--- a/Higher_Education_Storyboard.pptx
+++ b/Higher_Education_Storyboard.pptx
@@ -2,7 +2,7 @@
 <file path=ppt/presentation.xml><?xml version="1.0" encoding="utf-8"?>
 <p:presentation xmlns:a="http://schemas.openxmlformats.org/drawingml/2006/main" xmlns:r="http://schemas.openxmlformats.org/officeDocument/2006/relationships" xmlns:p="http://schemas.openxmlformats.org/presentationml/2006/main" saveSubsetFonts="1">
   <p:sldMasterIdLst>
-    <p:sldMasterId id="2147483648" r:id="rId1"/>
+    <p:sldMasterId id="2147483720" r:id="rId1"/>
   </p:sldMasterIdLst>
   <p:sldIdLst>
     <p:sldId id="256" r:id="rId2"/>
@@ -16,7 +16,7 @@
     <a:defPPr>
       <a:defRPr lang="en-US"/>
     </a:defPPr>
-    <a:lvl1pPr marL="0" algn="l" defTabSz="914400" rtl="0" eaLnBrk="1" latinLnBrk="0" hangingPunct="1">
+    <a:lvl1pPr marL="0" algn="l" defTabSz="457200" rtl="0" eaLnBrk="1" latinLnBrk="0" hangingPunct="1">
       <a:defRPr sz="1800" kern="1200">
         <a:solidFill>
           <a:schemeClr val="tx1"/>
@@ -26,7 +26,7 @@
         <a:cs typeface="+mn-cs"/>
       </a:defRPr>
     </a:lvl1pPr>
-    <a:lvl2pPr marL="457200" algn="l" defTabSz="914400" rtl="0" eaLnBrk="1" latinLnBrk="0" hangingPunct="1">
+    <a:lvl2pPr marL="457200" algn="l" defTabSz="457200" rtl="0" eaLnBrk="1" latinLnBrk="0" hangingPunct="1">
       <a:defRPr sz="1800" kern="1200">
         <a:solidFill>
           <a:schemeClr val="tx1"/>
@@ -36,7 +36,7 @@
         <a:cs typeface="+mn-cs"/>
       </a:defRPr>
     </a:lvl2pPr>
-    <a:lvl3pPr marL="914400" algn="l" defTabSz="914400" rtl="0" eaLnBrk="1" latinLnBrk="0" hangingPunct="1">
+    <a:lvl3pPr marL="914400" algn="l" defTabSz="457200" rtl="0" eaLnBrk="1" latinLnBrk="0" hangingPunct="1">
       <a:defRPr sz="1800" kern="1200">
         <a:solidFill>
           <a:schemeClr val="tx1"/>
@@ -46,7 +46,7 @@
         <a:cs typeface="+mn-cs"/>
       </a:defRPr>
     </a:lvl3pPr>
-    <a:lvl4pPr marL="1371600" algn="l" defTabSz="914400" rtl="0" eaLnBrk="1" latinLnBrk="0" hangingPunct="1">
+    <a:lvl4pPr marL="1371600" algn="l" defTabSz="457200" rtl="0" eaLnBrk="1" latinLnBrk="0" hangingPunct="1">
       <a:defRPr sz="1800" kern="1200">
         <a:solidFill>
           <a:schemeClr val="tx1"/>
@@ -56,7 +56,7 @@
         <a:cs typeface="+mn-cs"/>
       </a:defRPr>
     </a:lvl4pPr>
-    <a:lvl5pPr marL="1828800" algn="l" defTabSz="914400" rtl="0" eaLnBrk="1" latinLnBrk="0" hangingPunct="1">
+    <a:lvl5pPr marL="1828800" algn="l" defTabSz="457200" rtl="0" eaLnBrk="1" latinLnBrk="0" hangingPunct="1">
       <a:defRPr sz="1800" kern="1200">
         <a:solidFill>
           <a:schemeClr val="tx1"/>
@@ -66,7 +66,7 @@
         <a:cs typeface="+mn-cs"/>
       </a:defRPr>
     </a:lvl5pPr>
-    <a:lvl6pPr marL="2286000" algn="l" defTabSz="914400" rtl="0" eaLnBrk="1" latinLnBrk="0" hangingPunct="1">
+    <a:lvl6pPr marL="2286000" algn="l" defTabSz="457200" rtl="0" eaLnBrk="1" latinLnBrk="0" hangingPunct="1">
       <a:defRPr sz="1800" kern="1200">
         <a:solidFill>
           <a:schemeClr val="tx1"/>
@@ -76,7 +76,7 @@
         <a:cs typeface="+mn-cs"/>
       </a:defRPr>
     </a:lvl6pPr>
-    <a:lvl7pPr marL="2743200" algn="l" defTabSz="914400" rtl="0" eaLnBrk="1" latinLnBrk="0" hangingPunct="1">
+    <a:lvl7pPr marL="2743200" algn="l" defTabSz="457200" rtl="0" eaLnBrk="1" latinLnBrk="0" hangingPunct="1">
       <a:defRPr sz="1800" kern="1200">
         <a:solidFill>
           <a:schemeClr val="tx1"/>
@@ -86,7 +86,7 @@
         <a:cs typeface="+mn-cs"/>
       </a:defRPr>
     </a:lvl7pPr>
-    <a:lvl8pPr marL="3200400" algn="l" defTabSz="914400" rtl="0" eaLnBrk="1" latinLnBrk="0" hangingPunct="1">
+    <a:lvl8pPr marL="3200400" algn="l" defTabSz="457200" rtl="0" eaLnBrk="1" latinLnBrk="0" hangingPunct="1">
       <a:defRPr sz="1800" kern="1200">
         <a:solidFill>
           <a:schemeClr val="tx1"/>
@@ -96,7 +96,7 @@
         <a:cs typeface="+mn-cs"/>
       </a:defRPr>
     </a:lvl8pPr>
-    <a:lvl9pPr marL="3657600" algn="l" defTabSz="914400" rtl="0" eaLnBrk="1" latinLnBrk="0" hangingPunct="1">
+    <a:lvl9pPr marL="3657600" algn="l" defTabSz="457200" rtl="0" eaLnBrk="1" latinLnBrk="0" hangingPunct="1">
       <a:defRPr sz="1800" kern="1200">
         <a:solidFill>
           <a:schemeClr val="tx1"/>
@@ -126,6 +126,616 @@
 </p:presentation>
 </file>
 
+<file path=ppt/revisionInfo.xml><?xml version="1.0" encoding="utf-8"?>
+<p1510:revInfo xmlns:a="http://schemas.openxmlformats.org/drawingml/2006/main" xmlns:r="http://schemas.openxmlformats.org/officeDocument/2006/relationships" xmlns:p1510="http://schemas.microsoft.com/office/powerpoint/2015/10/main">
+  <p1510:revLst>
+    <p1510:client id="{746D2CBA-9D1E-44E4-9B35-734F1330AC0E}" v="20" dt="2026-07-26T02:30:51.587"/>
+  </p1510:revLst>
+</p1510:revInfo>
+</file>
+
+<file path=ppt/changesInfos/changesInfo1.xml><?xml version="1.0" encoding="utf-8"?>
+<pc:chgInfo xmlns:a="http://schemas.openxmlformats.org/drawingml/2006/main" xmlns:r="http://schemas.openxmlformats.org/officeDocument/2006/relationships" xmlns:ac="http://schemas.microsoft.com/office/drawing/2013/main/command" xmlns:pc="http://schemas.microsoft.com/office/powerpoint/2013/main/command">
+  <pc:docChgLst>
+    <pc:chgData name="Anusha Cherukuru" userId="01e7eb29c35330fc" providerId="LiveId" clId="{15A6C34E-FED3-4D34-87C0-622DC429122F}"/>
+    <pc:docChg chg="undo custSel modSld">
+      <pc:chgData name="Anusha Cherukuru" userId="01e7eb29c35330fc" providerId="LiveId" clId="{15A6C34E-FED3-4D34-87C0-622DC429122F}" dt="2026-07-26T02:31:02.922" v="38" actId="208"/>
+      <pc:docMkLst>
+        <pc:docMk/>
+      </pc:docMkLst>
+      <pc:sldChg chg="addSp modSp mod">
+        <pc:chgData name="Anusha Cherukuru" userId="01e7eb29c35330fc" providerId="LiveId" clId="{15A6C34E-FED3-4D34-87C0-622DC429122F}" dt="2026-07-26T02:30:30.448" v="32" actId="208"/>
+        <pc:sldMkLst>
+          <pc:docMk/>
+          <pc:sldMk cId="2143251387" sldId="256"/>
+        </pc:sldMkLst>
+        <pc:spChg chg="add mod">
+          <ac:chgData name="Anusha Cherukuru" userId="01e7eb29c35330fc" providerId="LiveId" clId="{15A6C34E-FED3-4D34-87C0-622DC429122F}" dt="2026-07-26T02:26:40.244" v="1" actId="571"/>
+          <ac:spMkLst>
+            <pc:docMk/>
+            <pc:sldMk cId="2143251387" sldId="256"/>
+            <ac:spMk id="2" creationId="{EE3D37AC-8BC2-8A47-7F9E-37EC062F47E1}"/>
+          </ac:spMkLst>
+        </pc:spChg>
+        <pc:spChg chg="add mod">
+          <ac:chgData name="Anusha Cherukuru" userId="01e7eb29c35330fc" providerId="LiveId" clId="{15A6C34E-FED3-4D34-87C0-622DC429122F}" dt="2026-07-26T02:26:40.244" v="1" actId="571"/>
+          <ac:spMkLst>
+            <pc:docMk/>
+            <pc:sldMk cId="2143251387" sldId="256"/>
+            <ac:spMk id="3" creationId="{ADA1C028-0746-7210-C189-85F4D7662F6A}"/>
+          </ac:spMkLst>
+        </pc:spChg>
+        <pc:spChg chg="add mod">
+          <ac:chgData name="Anusha Cherukuru" userId="01e7eb29c35330fc" providerId="LiveId" clId="{15A6C34E-FED3-4D34-87C0-622DC429122F}" dt="2026-07-26T02:26:40.244" v="1" actId="571"/>
+          <ac:spMkLst>
+            <pc:docMk/>
+            <pc:sldMk cId="2143251387" sldId="256"/>
+            <ac:spMk id="5" creationId="{1DE1A62F-EC7D-EA05-8A7A-8687B84661CE}"/>
+          </ac:spMkLst>
+        </pc:spChg>
+        <pc:spChg chg="add mod">
+          <ac:chgData name="Anusha Cherukuru" userId="01e7eb29c35330fc" providerId="LiveId" clId="{15A6C34E-FED3-4D34-87C0-622DC429122F}" dt="2026-07-26T02:26:40.244" v="1" actId="571"/>
+          <ac:spMkLst>
+            <pc:docMk/>
+            <pc:sldMk cId="2143251387" sldId="256"/>
+            <ac:spMk id="6" creationId="{AD5F20A4-13D8-2529-BA05-3C1F1D6DFAA8}"/>
+          </ac:spMkLst>
+        </pc:spChg>
+        <pc:spChg chg="add mod">
+          <ac:chgData name="Anusha Cherukuru" userId="01e7eb29c35330fc" providerId="LiveId" clId="{15A6C34E-FED3-4D34-87C0-622DC429122F}" dt="2026-07-26T02:26:40.244" v="1" actId="571"/>
+          <ac:spMkLst>
+            <pc:docMk/>
+            <pc:sldMk cId="2143251387" sldId="256"/>
+            <ac:spMk id="7" creationId="{F9A6BA7A-0560-2C9C-926D-B931918F098E}"/>
+          </ac:spMkLst>
+        </pc:spChg>
+        <pc:spChg chg="add mod">
+          <ac:chgData name="Anusha Cherukuru" userId="01e7eb29c35330fc" providerId="LiveId" clId="{15A6C34E-FED3-4D34-87C0-622DC429122F}" dt="2026-07-26T02:26:40.244" v="1" actId="571"/>
+          <ac:spMkLst>
+            <pc:docMk/>
+            <pc:sldMk cId="2143251387" sldId="256"/>
+            <ac:spMk id="8" creationId="{8962C15E-FB8C-1508-A697-C5744DEFFEA8}"/>
+          </ac:spMkLst>
+        </pc:spChg>
+        <pc:spChg chg="add mod">
+          <ac:chgData name="Anusha Cherukuru" userId="01e7eb29c35330fc" providerId="LiveId" clId="{15A6C34E-FED3-4D34-87C0-622DC429122F}" dt="2026-07-26T02:26:40.244" v="1" actId="571"/>
+          <ac:spMkLst>
+            <pc:docMk/>
+            <pc:sldMk cId="2143251387" sldId="256"/>
+            <ac:spMk id="9" creationId="{0B1E474C-D951-AB3E-C215-2D46DDFF7812}"/>
+          </ac:spMkLst>
+        </pc:spChg>
+        <pc:spChg chg="add mod">
+          <ac:chgData name="Anusha Cherukuru" userId="01e7eb29c35330fc" providerId="LiveId" clId="{15A6C34E-FED3-4D34-87C0-622DC429122F}" dt="2026-07-26T02:29:45.501" v="25" actId="571"/>
+          <ac:spMkLst>
+            <pc:docMk/>
+            <pc:sldMk cId="2143251387" sldId="256"/>
+            <ac:spMk id="10" creationId="{49AC407C-22A1-FB95-DFFE-743D859B9649}"/>
+          </ac:spMkLst>
+        </pc:spChg>
+        <pc:spChg chg="mod">
+          <ac:chgData name="Anusha Cherukuru" userId="01e7eb29c35330fc" providerId="LiveId" clId="{15A6C34E-FED3-4D34-87C0-622DC429122F}" dt="2026-07-26T02:30:30.448" v="32" actId="208"/>
+          <ac:spMkLst>
+            <pc:docMk/>
+            <pc:sldMk cId="2143251387" sldId="256"/>
+            <ac:spMk id="11" creationId="{1A73D45B-3649-BF91-38BE-D6E278053A3A}"/>
+          </ac:spMkLst>
+        </pc:spChg>
+        <pc:spChg chg="add mod">
+          <ac:chgData name="Anusha Cherukuru" userId="01e7eb29c35330fc" providerId="LiveId" clId="{15A6C34E-FED3-4D34-87C0-622DC429122F}" dt="2026-07-26T02:29:45.501" v="25" actId="571"/>
+          <ac:spMkLst>
+            <pc:docMk/>
+            <pc:sldMk cId="2143251387" sldId="256"/>
+            <ac:spMk id="12" creationId="{ECF2F4DE-9D2D-C79E-157F-6D749759B72F}"/>
+          </ac:spMkLst>
+        </pc:spChg>
+        <pc:spChg chg="mod">
+          <ac:chgData name="Anusha Cherukuru" userId="01e7eb29c35330fc" providerId="LiveId" clId="{15A6C34E-FED3-4D34-87C0-622DC429122F}" dt="2026-07-26T02:30:30.448" v="32" actId="208"/>
+          <ac:spMkLst>
+            <pc:docMk/>
+            <pc:sldMk cId="2143251387" sldId="256"/>
+            <ac:spMk id="13" creationId="{85040B37-EC29-36FA-8410-7601DC872889}"/>
+          </ac:spMkLst>
+        </pc:spChg>
+        <pc:spChg chg="add mod">
+          <ac:chgData name="Anusha Cherukuru" userId="01e7eb29c35330fc" providerId="LiveId" clId="{15A6C34E-FED3-4D34-87C0-622DC429122F}" dt="2026-07-26T02:29:45.501" v="25" actId="571"/>
+          <ac:spMkLst>
+            <pc:docMk/>
+            <pc:sldMk cId="2143251387" sldId="256"/>
+            <ac:spMk id="14" creationId="{7267444C-9B6B-7380-2F16-A224E5B2AD03}"/>
+          </ac:spMkLst>
+        </pc:spChg>
+        <pc:spChg chg="mod">
+          <ac:chgData name="Anusha Cherukuru" userId="01e7eb29c35330fc" providerId="LiveId" clId="{15A6C34E-FED3-4D34-87C0-622DC429122F}" dt="2026-07-26T02:30:30.448" v="32" actId="208"/>
+          <ac:spMkLst>
+            <pc:docMk/>
+            <pc:sldMk cId="2143251387" sldId="256"/>
+            <ac:spMk id="15" creationId="{87BB012D-38BF-9DEE-2EFD-9BFA35BDA635}"/>
+          </ac:spMkLst>
+        </pc:spChg>
+        <pc:spChg chg="add mod">
+          <ac:chgData name="Anusha Cherukuru" userId="01e7eb29c35330fc" providerId="LiveId" clId="{15A6C34E-FED3-4D34-87C0-622DC429122F}" dt="2026-07-26T02:29:45.501" v="25" actId="571"/>
+          <ac:spMkLst>
+            <pc:docMk/>
+            <pc:sldMk cId="2143251387" sldId="256"/>
+            <ac:spMk id="16" creationId="{4DC9E14E-D666-B1A4-97CB-C2E9F30A2B7C}"/>
+          </ac:spMkLst>
+        </pc:spChg>
+        <pc:spChg chg="mod">
+          <ac:chgData name="Anusha Cherukuru" userId="01e7eb29c35330fc" providerId="LiveId" clId="{15A6C34E-FED3-4D34-87C0-622DC429122F}" dt="2026-07-26T02:30:30.448" v="32" actId="208"/>
+          <ac:spMkLst>
+            <pc:docMk/>
+            <pc:sldMk cId="2143251387" sldId="256"/>
+            <ac:spMk id="17" creationId="{4FBD291D-CC75-4DA0-86DF-C08B0C673F76}"/>
+          </ac:spMkLst>
+        </pc:spChg>
+        <pc:spChg chg="add mod">
+          <ac:chgData name="Anusha Cherukuru" userId="01e7eb29c35330fc" providerId="LiveId" clId="{15A6C34E-FED3-4D34-87C0-622DC429122F}" dt="2026-07-26T02:29:45.501" v="25" actId="571"/>
+          <ac:spMkLst>
+            <pc:docMk/>
+            <pc:sldMk cId="2143251387" sldId="256"/>
+            <ac:spMk id="18" creationId="{D6F11E97-07AA-BB11-326B-41AA39B611DA}"/>
+          </ac:spMkLst>
+        </pc:spChg>
+        <pc:spChg chg="add mod">
+          <ac:chgData name="Anusha Cherukuru" userId="01e7eb29c35330fc" providerId="LiveId" clId="{15A6C34E-FED3-4D34-87C0-622DC429122F}" dt="2026-07-26T02:29:45.501" v="25" actId="571"/>
+          <ac:spMkLst>
+            <pc:docMk/>
+            <pc:sldMk cId="2143251387" sldId="256"/>
+            <ac:spMk id="19" creationId="{B34A545E-C7DD-158B-904E-5E62D7676BF3}"/>
+          </ac:spMkLst>
+        </pc:spChg>
+        <pc:spChg chg="mod">
+          <ac:chgData name="Anusha Cherukuru" userId="01e7eb29c35330fc" providerId="LiveId" clId="{15A6C34E-FED3-4D34-87C0-622DC429122F}" dt="2026-07-26T02:30:30.448" v="32" actId="208"/>
+          <ac:spMkLst>
+            <pc:docMk/>
+            <pc:sldMk cId="2143251387" sldId="256"/>
+            <ac:spMk id="20" creationId="{BCA7D451-3B0C-172C-AD47-550F7B656670}"/>
+          </ac:spMkLst>
+        </pc:spChg>
+        <pc:spChg chg="add mod">
+          <ac:chgData name="Anusha Cherukuru" userId="01e7eb29c35330fc" providerId="LiveId" clId="{15A6C34E-FED3-4D34-87C0-622DC429122F}" dt="2026-07-26T02:29:45.501" v="25" actId="571"/>
+          <ac:spMkLst>
+            <pc:docMk/>
+            <pc:sldMk cId="2143251387" sldId="256"/>
+            <ac:spMk id="21" creationId="{5A16A1E5-146A-B735-21B3-AA9DDD6C327C}"/>
+          </ac:spMkLst>
+        </pc:spChg>
+        <pc:spChg chg="mod">
+          <ac:chgData name="Anusha Cherukuru" userId="01e7eb29c35330fc" providerId="LiveId" clId="{15A6C34E-FED3-4D34-87C0-622DC429122F}" dt="2026-07-26T02:30:30.448" v="32" actId="208"/>
+          <ac:spMkLst>
+            <pc:docMk/>
+            <pc:sldMk cId="2143251387" sldId="256"/>
+            <ac:spMk id="22" creationId="{EB557CED-2D62-230D-464E-39E808AF44F0}"/>
+          </ac:spMkLst>
+        </pc:spChg>
+        <pc:spChg chg="mod">
+          <ac:chgData name="Anusha Cherukuru" userId="01e7eb29c35330fc" providerId="LiveId" clId="{15A6C34E-FED3-4D34-87C0-622DC429122F}" dt="2026-07-26T02:30:30.448" v="32" actId="208"/>
+          <ac:spMkLst>
+            <pc:docMk/>
+            <pc:sldMk cId="2143251387" sldId="256"/>
+            <ac:spMk id="23" creationId="{D77D02A9-722C-1841-7721-7E34A15392DB}"/>
+          </ac:spMkLst>
+        </pc:spChg>
+        <pc:spChg chg="mod">
+          <ac:chgData name="Anusha Cherukuru" userId="01e7eb29c35330fc" providerId="LiveId" clId="{15A6C34E-FED3-4D34-87C0-622DC429122F}" dt="2026-07-26T02:30:30.448" v="32" actId="208"/>
+          <ac:spMkLst>
+            <pc:docMk/>
+            <pc:sldMk cId="2143251387" sldId="256"/>
+            <ac:spMk id="29" creationId="{4713520A-81B0-57E3-C67C-F423A1D702DB}"/>
+          </ac:spMkLst>
+        </pc:spChg>
+      </pc:sldChg>
+      <pc:sldChg chg="modSp mod">
+        <pc:chgData name="Anusha Cherukuru" userId="01e7eb29c35330fc" providerId="LiveId" clId="{15A6C34E-FED3-4D34-87C0-622DC429122F}" dt="2026-07-26T02:30:41.667" v="33" actId="208"/>
+        <pc:sldMkLst>
+          <pc:docMk/>
+          <pc:sldMk cId="609258142" sldId="257"/>
+        </pc:sldMkLst>
+        <pc:spChg chg="mod">
+          <ac:chgData name="Anusha Cherukuru" userId="01e7eb29c35330fc" providerId="LiveId" clId="{15A6C34E-FED3-4D34-87C0-622DC429122F}" dt="2026-07-26T02:30:41.667" v="33" actId="208"/>
+          <ac:spMkLst>
+            <pc:docMk/>
+            <pc:sldMk cId="609258142" sldId="257"/>
+            <ac:spMk id="4" creationId="{F5A51DD9-D1D0-CFCD-674B-3A286C1ED4F6}"/>
+          </ac:spMkLst>
+        </pc:spChg>
+        <pc:spChg chg="mod">
+          <ac:chgData name="Anusha Cherukuru" userId="01e7eb29c35330fc" providerId="LiveId" clId="{15A6C34E-FED3-4D34-87C0-622DC429122F}" dt="2026-07-26T02:30:41.667" v="33" actId="208"/>
+          <ac:spMkLst>
+            <pc:docMk/>
+            <pc:sldMk cId="609258142" sldId="257"/>
+            <ac:spMk id="6" creationId="{5ADCE051-2BC1-B496-9F1D-B925161EB2B6}"/>
+          </ac:spMkLst>
+        </pc:spChg>
+        <pc:spChg chg="mod">
+          <ac:chgData name="Anusha Cherukuru" userId="01e7eb29c35330fc" providerId="LiveId" clId="{15A6C34E-FED3-4D34-87C0-622DC429122F}" dt="2026-07-26T02:30:41.667" v="33" actId="208"/>
+          <ac:spMkLst>
+            <pc:docMk/>
+            <pc:sldMk cId="609258142" sldId="257"/>
+            <ac:spMk id="8" creationId="{1335C341-CC18-D6A3-09B1-E7BDF7D4A66B}"/>
+          </ac:spMkLst>
+        </pc:spChg>
+        <pc:spChg chg="mod">
+          <ac:chgData name="Anusha Cherukuru" userId="01e7eb29c35330fc" providerId="LiveId" clId="{15A6C34E-FED3-4D34-87C0-622DC429122F}" dt="2026-07-26T02:30:41.667" v="33" actId="208"/>
+          <ac:spMkLst>
+            <pc:docMk/>
+            <pc:sldMk cId="609258142" sldId="257"/>
+            <ac:spMk id="10" creationId="{D7F3E58B-5170-63B6-101F-5B8B997B8B7D}"/>
+          </ac:spMkLst>
+        </pc:spChg>
+        <pc:spChg chg="mod">
+          <ac:chgData name="Anusha Cherukuru" userId="01e7eb29c35330fc" providerId="LiveId" clId="{15A6C34E-FED3-4D34-87C0-622DC429122F}" dt="2026-07-26T02:30:41.667" v="33" actId="208"/>
+          <ac:spMkLst>
+            <pc:docMk/>
+            <pc:sldMk cId="609258142" sldId="257"/>
+            <ac:spMk id="12" creationId="{56B41D1A-F7F2-210B-6F43-4F848C72CED3}"/>
+          </ac:spMkLst>
+        </pc:spChg>
+      </pc:sldChg>
+      <pc:sldChg chg="addSp modSp mod">
+        <pc:chgData name="Anusha Cherukuru" userId="01e7eb29c35330fc" providerId="LiveId" clId="{15A6C34E-FED3-4D34-87C0-622DC429122F}" dt="2026-07-26T02:31:02.922" v="38" actId="208"/>
+        <pc:sldMkLst>
+          <pc:docMk/>
+          <pc:sldMk cId="3221234724" sldId="258"/>
+        </pc:sldMkLst>
+        <pc:spChg chg="add mod">
+          <ac:chgData name="Anusha Cherukuru" userId="01e7eb29c35330fc" providerId="LiveId" clId="{15A6C34E-FED3-4D34-87C0-622DC429122F}" dt="2026-07-26T02:27:48.539" v="11" actId="571"/>
+          <ac:spMkLst>
+            <pc:docMk/>
+            <pc:sldMk cId="3221234724" sldId="258"/>
+            <ac:spMk id="2" creationId="{AFAD3600-26BA-10B1-A984-239A704EA457}"/>
+          </ac:spMkLst>
+        </pc:spChg>
+        <pc:spChg chg="add mod">
+          <ac:chgData name="Anusha Cherukuru" userId="01e7eb29c35330fc" providerId="LiveId" clId="{15A6C34E-FED3-4D34-87C0-622DC429122F}" dt="2026-07-26T02:27:48.539" v="11" actId="571"/>
+          <ac:spMkLst>
+            <pc:docMk/>
+            <pc:sldMk cId="3221234724" sldId="258"/>
+            <ac:spMk id="3" creationId="{08399A90-84BB-3388-9A92-030B338C4CF9}"/>
+          </ac:spMkLst>
+        </pc:spChg>
+        <pc:spChg chg="mod">
+          <ac:chgData name="Anusha Cherukuru" userId="01e7eb29c35330fc" providerId="LiveId" clId="{15A6C34E-FED3-4D34-87C0-622DC429122F}" dt="2026-07-26T02:31:02.922" v="38" actId="208"/>
+          <ac:spMkLst>
+            <pc:docMk/>
+            <pc:sldMk cId="3221234724" sldId="258"/>
+            <ac:spMk id="4" creationId="{A78CEC8A-253C-E63E-213D-2C4C752DB945}"/>
+          </ac:spMkLst>
+        </pc:spChg>
+        <pc:spChg chg="add mod">
+          <ac:chgData name="Anusha Cherukuru" userId="01e7eb29c35330fc" providerId="LiveId" clId="{15A6C34E-FED3-4D34-87C0-622DC429122F}" dt="2026-07-26T02:27:48.539" v="11" actId="571"/>
+          <ac:spMkLst>
+            <pc:docMk/>
+            <pc:sldMk cId="3221234724" sldId="258"/>
+            <ac:spMk id="5" creationId="{6A5F00E9-E336-9159-D191-16C26B39B28E}"/>
+          </ac:spMkLst>
+        </pc:spChg>
+        <pc:spChg chg="mod">
+          <ac:chgData name="Anusha Cherukuru" userId="01e7eb29c35330fc" providerId="LiveId" clId="{15A6C34E-FED3-4D34-87C0-622DC429122F}" dt="2026-07-26T02:31:02.922" v="38" actId="208"/>
+          <ac:spMkLst>
+            <pc:docMk/>
+            <pc:sldMk cId="3221234724" sldId="258"/>
+            <ac:spMk id="6" creationId="{F4826090-6985-A558-AA67-566F0059664D}"/>
+          </ac:spMkLst>
+        </pc:spChg>
+        <pc:spChg chg="add mod">
+          <ac:chgData name="Anusha Cherukuru" userId="01e7eb29c35330fc" providerId="LiveId" clId="{15A6C34E-FED3-4D34-87C0-622DC429122F}" dt="2026-07-26T02:27:52.279" v="13" actId="571"/>
+          <ac:spMkLst>
+            <pc:docMk/>
+            <pc:sldMk cId="3221234724" sldId="258"/>
+            <ac:spMk id="7" creationId="{1986D49F-1BBF-F1DD-1CD0-C57245BE5AEA}"/>
+          </ac:spMkLst>
+        </pc:spChg>
+        <pc:spChg chg="mod">
+          <ac:chgData name="Anusha Cherukuru" userId="01e7eb29c35330fc" providerId="LiveId" clId="{15A6C34E-FED3-4D34-87C0-622DC429122F}" dt="2026-07-26T02:31:02.922" v="38" actId="208"/>
+          <ac:spMkLst>
+            <pc:docMk/>
+            <pc:sldMk cId="3221234724" sldId="258"/>
+            <ac:spMk id="8" creationId="{3A2A0870-1A36-90AA-30C6-3D8ED0EEBD59}"/>
+          </ac:spMkLst>
+        </pc:spChg>
+        <pc:spChg chg="add mod">
+          <ac:chgData name="Anusha Cherukuru" userId="01e7eb29c35330fc" providerId="LiveId" clId="{15A6C34E-FED3-4D34-87C0-622DC429122F}" dt="2026-07-26T02:27:52.279" v="13" actId="571"/>
+          <ac:spMkLst>
+            <pc:docMk/>
+            <pc:sldMk cId="3221234724" sldId="258"/>
+            <ac:spMk id="9" creationId="{84B8D736-F882-5144-0200-C131C47B3806}"/>
+          </ac:spMkLst>
+        </pc:spChg>
+        <pc:spChg chg="mod">
+          <ac:chgData name="Anusha Cherukuru" userId="01e7eb29c35330fc" providerId="LiveId" clId="{15A6C34E-FED3-4D34-87C0-622DC429122F}" dt="2026-07-26T02:31:02.922" v="38" actId="208"/>
+          <ac:spMkLst>
+            <pc:docMk/>
+            <pc:sldMk cId="3221234724" sldId="258"/>
+            <ac:spMk id="10" creationId="{9B6B0ED2-3D08-60D2-A29E-E60A60663441}"/>
+          </ac:spMkLst>
+        </pc:spChg>
+        <pc:spChg chg="add mod">
+          <ac:chgData name="Anusha Cherukuru" userId="01e7eb29c35330fc" providerId="LiveId" clId="{15A6C34E-FED3-4D34-87C0-622DC429122F}" dt="2026-07-26T02:27:52.279" v="13" actId="571"/>
+          <ac:spMkLst>
+            <pc:docMk/>
+            <pc:sldMk cId="3221234724" sldId="258"/>
+            <ac:spMk id="11" creationId="{1DCAF7A4-9016-C946-6019-0BCAB1EF58BB}"/>
+          </ac:spMkLst>
+        </pc:spChg>
+        <pc:spChg chg="mod">
+          <ac:chgData name="Anusha Cherukuru" userId="01e7eb29c35330fc" providerId="LiveId" clId="{15A6C34E-FED3-4D34-87C0-622DC429122F}" dt="2026-07-26T02:31:02.922" v="38" actId="208"/>
+          <ac:spMkLst>
+            <pc:docMk/>
+            <pc:sldMk cId="3221234724" sldId="258"/>
+            <ac:spMk id="12" creationId="{BAE03241-13CF-505A-26FF-34E06B428C13}"/>
+          </ac:spMkLst>
+        </pc:spChg>
+        <pc:spChg chg="add mod">
+          <ac:chgData name="Anusha Cherukuru" userId="01e7eb29c35330fc" providerId="LiveId" clId="{15A6C34E-FED3-4D34-87C0-622DC429122F}" dt="2026-07-26T02:27:52.279" v="13" actId="571"/>
+          <ac:spMkLst>
+            <pc:docMk/>
+            <pc:sldMk cId="3221234724" sldId="258"/>
+            <ac:spMk id="13" creationId="{2913EBE2-CFB8-648D-83FE-BD9255841C31}"/>
+          </ac:spMkLst>
+        </pc:spChg>
+        <pc:spChg chg="mod">
+          <ac:chgData name="Anusha Cherukuru" userId="01e7eb29c35330fc" providerId="LiveId" clId="{15A6C34E-FED3-4D34-87C0-622DC429122F}" dt="2026-07-26T02:31:02.922" v="38" actId="208"/>
+          <ac:spMkLst>
+            <pc:docMk/>
+            <pc:sldMk cId="3221234724" sldId="258"/>
+            <ac:spMk id="14" creationId="{0D71C732-6DD3-20FC-7F89-FD8241FFA3B6}"/>
+          </ac:spMkLst>
+        </pc:spChg>
+        <pc:spChg chg="add mod">
+          <ac:chgData name="Anusha Cherukuru" userId="01e7eb29c35330fc" providerId="LiveId" clId="{15A6C34E-FED3-4D34-87C0-622DC429122F}" dt="2026-07-26T02:27:52.279" v="13" actId="571"/>
+          <ac:spMkLst>
+            <pc:docMk/>
+            <pc:sldMk cId="3221234724" sldId="258"/>
+            <ac:spMk id="15" creationId="{591B9D4B-1052-F1A9-A63A-846000741DEB}"/>
+          </ac:spMkLst>
+        </pc:spChg>
+        <pc:spChg chg="mod">
+          <ac:chgData name="Anusha Cherukuru" userId="01e7eb29c35330fc" providerId="LiveId" clId="{15A6C34E-FED3-4D34-87C0-622DC429122F}" dt="2026-07-26T02:31:02.922" v="38" actId="208"/>
+          <ac:spMkLst>
+            <pc:docMk/>
+            <pc:sldMk cId="3221234724" sldId="258"/>
+            <ac:spMk id="16" creationId="{4E2955A0-D06A-BE85-5C76-95FE62C74889}"/>
+          </ac:spMkLst>
+        </pc:spChg>
+        <pc:spChg chg="add mod">
+          <ac:chgData name="Anusha Cherukuru" userId="01e7eb29c35330fc" providerId="LiveId" clId="{15A6C34E-FED3-4D34-87C0-622DC429122F}" dt="2026-07-26T02:27:52.279" v="13" actId="571"/>
+          <ac:spMkLst>
+            <pc:docMk/>
+            <pc:sldMk cId="3221234724" sldId="258"/>
+            <ac:spMk id="17" creationId="{D3248084-CD7E-8302-3511-B215F686256D}"/>
+          </ac:spMkLst>
+        </pc:spChg>
+        <pc:spChg chg="mod">
+          <ac:chgData name="Anusha Cherukuru" userId="01e7eb29c35330fc" providerId="LiveId" clId="{15A6C34E-FED3-4D34-87C0-622DC429122F}" dt="2026-07-26T02:31:02.922" v="38" actId="208"/>
+          <ac:spMkLst>
+            <pc:docMk/>
+            <pc:sldMk cId="3221234724" sldId="258"/>
+            <ac:spMk id="18" creationId="{AD71F8C7-9124-FF52-590A-A4B0E7517D84}"/>
+          </ac:spMkLst>
+        </pc:spChg>
+        <pc:spChg chg="add mod">
+          <ac:chgData name="Anusha Cherukuru" userId="01e7eb29c35330fc" providerId="LiveId" clId="{15A6C34E-FED3-4D34-87C0-622DC429122F}" dt="2026-07-26T02:30:51.587" v="35" actId="571"/>
+          <ac:spMkLst>
+            <pc:docMk/>
+            <pc:sldMk cId="3221234724" sldId="258"/>
+            <ac:spMk id="20" creationId="{4C2B8A0E-CFA3-2890-BBDB-D211CA8359FD}"/>
+          </ac:spMkLst>
+        </pc:spChg>
+        <pc:spChg chg="add mod">
+          <ac:chgData name="Anusha Cherukuru" userId="01e7eb29c35330fc" providerId="LiveId" clId="{15A6C34E-FED3-4D34-87C0-622DC429122F}" dt="2026-07-26T02:30:51.587" v="35" actId="571"/>
+          <ac:spMkLst>
+            <pc:docMk/>
+            <pc:sldMk cId="3221234724" sldId="258"/>
+            <ac:spMk id="21" creationId="{56465817-B16A-6CF1-8005-0927A367296C}"/>
+          </ac:spMkLst>
+        </pc:spChg>
+        <pc:spChg chg="add mod">
+          <ac:chgData name="Anusha Cherukuru" userId="01e7eb29c35330fc" providerId="LiveId" clId="{15A6C34E-FED3-4D34-87C0-622DC429122F}" dt="2026-07-26T02:30:51.587" v="35" actId="571"/>
+          <ac:spMkLst>
+            <pc:docMk/>
+            <pc:sldMk cId="3221234724" sldId="258"/>
+            <ac:spMk id="22" creationId="{36163083-3D75-6D23-98FB-6FF6CE34FA61}"/>
+          </ac:spMkLst>
+        </pc:spChg>
+        <pc:spChg chg="add mod">
+          <ac:chgData name="Anusha Cherukuru" userId="01e7eb29c35330fc" providerId="LiveId" clId="{15A6C34E-FED3-4D34-87C0-622DC429122F}" dt="2026-07-26T02:30:51.587" v="35" actId="571"/>
+          <ac:spMkLst>
+            <pc:docMk/>
+            <pc:sldMk cId="3221234724" sldId="258"/>
+            <ac:spMk id="23" creationId="{62EF3D65-1E14-57B2-0351-2D41D2C3A54B}"/>
+          </ac:spMkLst>
+        </pc:spChg>
+        <pc:spChg chg="add mod">
+          <ac:chgData name="Anusha Cherukuru" userId="01e7eb29c35330fc" providerId="LiveId" clId="{15A6C34E-FED3-4D34-87C0-622DC429122F}" dt="2026-07-26T02:30:51.587" v="35" actId="571"/>
+          <ac:spMkLst>
+            <pc:docMk/>
+            <pc:sldMk cId="3221234724" sldId="258"/>
+            <ac:spMk id="24" creationId="{8D70616D-A36E-D5B1-AFB2-3067D3945DD9}"/>
+          </ac:spMkLst>
+        </pc:spChg>
+        <pc:spChg chg="mod">
+          <ac:chgData name="Anusha Cherukuru" userId="01e7eb29c35330fc" providerId="LiveId" clId="{15A6C34E-FED3-4D34-87C0-622DC429122F}" dt="2026-07-26T02:31:02.922" v="38" actId="208"/>
+          <ac:spMkLst>
+            <pc:docMk/>
+            <pc:sldMk cId="3221234724" sldId="258"/>
+            <ac:spMk id="25" creationId="{2622F2E5-D6DB-4E3A-4B1F-078AA4D78CAA}"/>
+          </ac:spMkLst>
+        </pc:spChg>
+        <pc:spChg chg="add mod">
+          <ac:chgData name="Anusha Cherukuru" userId="01e7eb29c35330fc" providerId="LiveId" clId="{15A6C34E-FED3-4D34-87C0-622DC429122F}" dt="2026-07-26T02:30:51.587" v="35" actId="571"/>
+          <ac:spMkLst>
+            <pc:docMk/>
+            <pc:sldMk cId="3221234724" sldId="258"/>
+            <ac:spMk id="26" creationId="{7AAE3036-1FDA-2CB3-C83B-9FCBA5AAC9A2}"/>
+          </ac:spMkLst>
+        </pc:spChg>
+        <pc:spChg chg="add mod">
+          <ac:chgData name="Anusha Cherukuru" userId="01e7eb29c35330fc" providerId="LiveId" clId="{15A6C34E-FED3-4D34-87C0-622DC429122F}" dt="2026-07-26T02:30:51.587" v="35" actId="571"/>
+          <ac:spMkLst>
+            <pc:docMk/>
+            <pc:sldMk cId="3221234724" sldId="258"/>
+            <ac:spMk id="27" creationId="{914712CE-4B19-AE2D-0D20-290902394CE8}"/>
+          </ac:spMkLst>
+        </pc:spChg>
+      </pc:sldChg>
+      <pc:sldChg chg="addSp modSp mod">
+        <pc:chgData name="Anusha Cherukuru" userId="01e7eb29c35330fc" providerId="LiveId" clId="{15A6C34E-FED3-4D34-87C0-622DC429122F}" dt="2026-07-26T02:29:28.605" v="23" actId="208"/>
+        <pc:sldMkLst>
+          <pc:docMk/>
+          <pc:sldMk cId="2561962482" sldId="259"/>
+        </pc:sldMkLst>
+        <pc:spChg chg="add mod">
+          <ac:chgData name="Anusha Cherukuru" userId="01e7eb29c35330fc" providerId="LiveId" clId="{15A6C34E-FED3-4D34-87C0-622DC429122F}" dt="2026-07-26T02:28:11.550" v="17" actId="571"/>
+          <ac:spMkLst>
+            <pc:docMk/>
+            <pc:sldMk cId="2561962482" sldId="259"/>
+            <ac:spMk id="2" creationId="{B2B3D40B-61ED-E1C4-7D86-9C6DEBD4FC32}"/>
+          </ac:spMkLst>
+        </pc:spChg>
+        <pc:spChg chg="add mod">
+          <ac:chgData name="Anusha Cherukuru" userId="01e7eb29c35330fc" providerId="LiveId" clId="{15A6C34E-FED3-4D34-87C0-622DC429122F}" dt="2026-07-26T02:28:11.550" v="17" actId="571"/>
+          <ac:spMkLst>
+            <pc:docMk/>
+            <pc:sldMk cId="2561962482" sldId="259"/>
+            <ac:spMk id="3" creationId="{24E9D02F-01FA-7E23-15FF-5E3984B4ED90}"/>
+          </ac:spMkLst>
+        </pc:spChg>
+        <pc:spChg chg="mod">
+          <ac:chgData name="Anusha Cherukuru" userId="01e7eb29c35330fc" providerId="LiveId" clId="{15A6C34E-FED3-4D34-87C0-622DC429122F}" dt="2026-07-26T02:29:28.605" v="23" actId="208"/>
+          <ac:spMkLst>
+            <pc:docMk/>
+            <pc:sldMk cId="2561962482" sldId="259"/>
+            <ac:spMk id="4" creationId="{559CEB4D-699F-637F-0D11-FEB8DE4A6A0B}"/>
+          </ac:spMkLst>
+        </pc:spChg>
+        <pc:spChg chg="add mod">
+          <ac:chgData name="Anusha Cherukuru" userId="01e7eb29c35330fc" providerId="LiveId" clId="{15A6C34E-FED3-4D34-87C0-622DC429122F}" dt="2026-07-26T02:28:11.550" v="17" actId="571"/>
+          <ac:spMkLst>
+            <pc:docMk/>
+            <pc:sldMk cId="2561962482" sldId="259"/>
+            <ac:spMk id="5" creationId="{81F163C3-4314-16F2-1E2F-E2E770DF8847}"/>
+          </ac:spMkLst>
+        </pc:spChg>
+        <pc:spChg chg="mod">
+          <ac:chgData name="Anusha Cherukuru" userId="01e7eb29c35330fc" providerId="LiveId" clId="{15A6C34E-FED3-4D34-87C0-622DC429122F}" dt="2026-07-26T02:29:28.605" v="23" actId="208"/>
+          <ac:spMkLst>
+            <pc:docMk/>
+            <pc:sldMk cId="2561962482" sldId="259"/>
+            <ac:spMk id="6" creationId="{0299E34A-3815-B5B5-AB91-19EF0989C473}"/>
+          </ac:spMkLst>
+        </pc:spChg>
+        <pc:spChg chg="add mod">
+          <ac:chgData name="Anusha Cherukuru" userId="01e7eb29c35330fc" providerId="LiveId" clId="{15A6C34E-FED3-4D34-87C0-622DC429122F}" dt="2026-07-26T02:28:11.550" v="17" actId="571"/>
+          <ac:spMkLst>
+            <pc:docMk/>
+            <pc:sldMk cId="2561962482" sldId="259"/>
+            <ac:spMk id="7" creationId="{02EA0078-509F-3F70-F15D-A72A2D2F6E68}"/>
+          </ac:spMkLst>
+        </pc:spChg>
+        <pc:spChg chg="mod">
+          <ac:chgData name="Anusha Cherukuru" userId="01e7eb29c35330fc" providerId="LiveId" clId="{15A6C34E-FED3-4D34-87C0-622DC429122F}" dt="2026-07-26T02:29:28.605" v="23" actId="208"/>
+          <ac:spMkLst>
+            <pc:docMk/>
+            <pc:sldMk cId="2561962482" sldId="259"/>
+            <ac:spMk id="8" creationId="{F2782996-40FD-F96E-E9D9-E5B70A920CE1}"/>
+          </ac:spMkLst>
+        </pc:spChg>
+        <pc:spChg chg="add mod">
+          <ac:chgData name="Anusha Cherukuru" userId="01e7eb29c35330fc" providerId="LiveId" clId="{15A6C34E-FED3-4D34-87C0-622DC429122F}" dt="2026-07-26T02:28:14.399" v="19" actId="571"/>
+          <ac:spMkLst>
+            <pc:docMk/>
+            <pc:sldMk cId="2561962482" sldId="259"/>
+            <ac:spMk id="9" creationId="{30783B27-8E74-6A4D-C475-6B857A5F8EC1}"/>
+          </ac:spMkLst>
+        </pc:spChg>
+        <pc:spChg chg="mod">
+          <ac:chgData name="Anusha Cherukuru" userId="01e7eb29c35330fc" providerId="LiveId" clId="{15A6C34E-FED3-4D34-87C0-622DC429122F}" dt="2026-07-26T02:29:28.605" v="23" actId="208"/>
+          <ac:spMkLst>
+            <pc:docMk/>
+            <pc:sldMk cId="2561962482" sldId="259"/>
+            <ac:spMk id="10" creationId="{4049382E-1504-0764-BA05-0B085DFB8F36}"/>
+          </ac:spMkLst>
+        </pc:spChg>
+        <pc:spChg chg="mod">
+          <ac:chgData name="Anusha Cherukuru" userId="01e7eb29c35330fc" providerId="LiveId" clId="{15A6C34E-FED3-4D34-87C0-622DC429122F}" dt="2026-07-26T02:29:28.605" v="23" actId="208"/>
+          <ac:spMkLst>
+            <pc:docMk/>
+            <pc:sldMk cId="2561962482" sldId="259"/>
+            <ac:spMk id="11" creationId="{B88F1772-91EA-3002-7B1C-641E0BF82E10}"/>
+          </ac:spMkLst>
+        </pc:spChg>
+        <pc:spChg chg="add mod">
+          <ac:chgData name="Anusha Cherukuru" userId="01e7eb29c35330fc" providerId="LiveId" clId="{15A6C34E-FED3-4D34-87C0-622DC429122F}" dt="2026-07-26T02:28:14.399" v="19" actId="571"/>
+          <ac:spMkLst>
+            <pc:docMk/>
+            <pc:sldMk cId="2561962482" sldId="259"/>
+            <ac:spMk id="12" creationId="{47285C69-BC39-F6FC-C6B5-98B374EF23B5}"/>
+          </ac:spMkLst>
+        </pc:spChg>
+        <pc:spChg chg="mod">
+          <ac:chgData name="Anusha Cherukuru" userId="01e7eb29c35330fc" providerId="LiveId" clId="{15A6C34E-FED3-4D34-87C0-622DC429122F}" dt="2026-07-26T02:29:28.605" v="23" actId="208"/>
+          <ac:spMkLst>
+            <pc:docMk/>
+            <pc:sldMk cId="2561962482" sldId="259"/>
+            <ac:spMk id="13" creationId="{7FD8A940-F4F4-E997-B00C-4928AA2C897D}"/>
+          </ac:spMkLst>
+        </pc:spChg>
+        <pc:spChg chg="add mod">
+          <ac:chgData name="Anusha Cherukuru" userId="01e7eb29c35330fc" providerId="LiveId" clId="{15A6C34E-FED3-4D34-87C0-622DC429122F}" dt="2026-07-26T02:28:14.399" v="19" actId="571"/>
+          <ac:spMkLst>
+            <pc:docMk/>
+            <pc:sldMk cId="2561962482" sldId="259"/>
+            <ac:spMk id="14" creationId="{4E6065E7-9A3B-6079-E8C1-AD2D28CDB2CD}"/>
+          </ac:spMkLst>
+        </pc:spChg>
+        <pc:spChg chg="mod">
+          <ac:chgData name="Anusha Cherukuru" userId="01e7eb29c35330fc" providerId="LiveId" clId="{15A6C34E-FED3-4D34-87C0-622DC429122F}" dt="2026-07-26T02:29:28.605" v="23" actId="208"/>
+          <ac:spMkLst>
+            <pc:docMk/>
+            <pc:sldMk cId="2561962482" sldId="259"/>
+            <ac:spMk id="15" creationId="{BFD91C3B-14E6-8F10-D129-AF4B29C65B94}"/>
+          </ac:spMkLst>
+        </pc:spChg>
+        <pc:spChg chg="add mod">
+          <ac:chgData name="Anusha Cherukuru" userId="01e7eb29c35330fc" providerId="LiveId" clId="{15A6C34E-FED3-4D34-87C0-622DC429122F}" dt="2026-07-26T02:28:14.399" v="19" actId="571"/>
+          <ac:spMkLst>
+            <pc:docMk/>
+            <pc:sldMk cId="2561962482" sldId="259"/>
+            <ac:spMk id="16" creationId="{6F6AC2D4-BA5B-4AE8-D3ED-7CB0FB8D4AA6}"/>
+          </ac:spMkLst>
+        </pc:spChg>
+        <pc:spChg chg="mod">
+          <ac:chgData name="Anusha Cherukuru" userId="01e7eb29c35330fc" providerId="LiveId" clId="{15A6C34E-FED3-4D34-87C0-622DC429122F}" dt="2026-07-26T02:29:28.605" v="23" actId="208"/>
+          <ac:spMkLst>
+            <pc:docMk/>
+            <pc:sldMk cId="2561962482" sldId="259"/>
+            <ac:spMk id="17" creationId="{504AC163-C203-3F9B-F861-C6E377AD4BD6}"/>
+          </ac:spMkLst>
+        </pc:spChg>
+        <pc:spChg chg="add mod">
+          <ac:chgData name="Anusha Cherukuru" userId="01e7eb29c35330fc" providerId="LiveId" clId="{15A6C34E-FED3-4D34-87C0-622DC429122F}" dt="2026-07-26T02:28:14.399" v="19" actId="571"/>
+          <ac:spMkLst>
+            <pc:docMk/>
+            <pc:sldMk cId="2561962482" sldId="259"/>
+            <ac:spMk id="19" creationId="{94639806-BBB6-7312-A6A4-E1214CE2D2FE}"/>
+          </ac:spMkLst>
+        </pc:spChg>
+        <pc:spChg chg="add mod">
+          <ac:chgData name="Anusha Cherukuru" userId="01e7eb29c35330fc" providerId="LiveId" clId="{15A6C34E-FED3-4D34-87C0-622DC429122F}" dt="2026-07-26T02:28:14.399" v="19" actId="571"/>
+          <ac:spMkLst>
+            <pc:docMk/>
+            <pc:sldMk cId="2561962482" sldId="259"/>
+            <ac:spMk id="20" creationId="{EB75D1B5-066A-4A90-4D51-F2DE8DCF1679}"/>
+          </ac:spMkLst>
+        </pc:spChg>
+      </pc:sldChg>
+    </pc:docChg>
+  </pc:docChgLst>
+</pc:chgInfo>
+</file>
+
 <file path=ppt/slideLayouts/slideLayout1.xml><?xml version="1.0" encoding="utf-8"?>
 <p:sldLayout xmlns:a="http://schemas.openxmlformats.org/drawingml/2006/main" xmlns:r="http://schemas.openxmlformats.org/officeDocument/2006/relationships" xmlns:p="http://schemas.openxmlformats.org/presentationml/2006/main" type="title" preserve="1">
   <p:cSld name="Title Slide">
@@ -145,13 +755,7 @@
       </p:grpSpPr>
       <p:sp>
         <p:nvSpPr>
-          <p:cNvPr id="2" name="Title 1">
-            <a:extLst>
-              <a:ext uri="{FF2B5EF4-FFF2-40B4-BE49-F238E27FC236}">
-                <a16:creationId xmlns:a16="http://schemas.microsoft.com/office/drawing/2014/main" id="{0E2E9E50-A973-4D57-5514-61C694D96811}"/>
-              </a:ext>
-            </a:extLst>
-          </p:cNvPr>
+          <p:cNvPr id="2" name="Title 1"/>
           <p:cNvSpPr>
             <a:spLocks noGrp="1"/>
           </p:cNvSpPr>
@@ -177,19 +781,13 @@
               <a:rPr lang="en-US"/>
               <a:t>Click to edit Master title style</a:t>
             </a:r>
-            <a:endParaRPr lang="en-IN"/>
-          </a:p>
-        </p:txBody>
-      </p:sp>
-      <p:sp>
-        <p:nvSpPr>
-          <p:cNvPr id="3" name="Subtitle 2">
-            <a:extLst>
-              <a:ext uri="{FF2B5EF4-FFF2-40B4-BE49-F238E27FC236}">
-                <a16:creationId xmlns:a16="http://schemas.microsoft.com/office/drawing/2014/main" id="{A173B425-DABD-F6C3-9550-2122A96307AC}"/>
-              </a:ext>
-            </a:extLst>
-          </p:cNvPr>
+            <a:endParaRPr lang="en-US" dirty="0"/>
+          </a:p>
+        </p:txBody>
+      </p:sp>
+      <p:sp>
+        <p:nvSpPr>
+          <p:cNvPr id="3" name="Subtitle 2"/>
           <p:cNvSpPr>
             <a:spLocks noGrp="1"/>
           </p:cNvSpPr>
@@ -248,19 +846,13 @@
               <a:rPr lang="en-US"/>
               <a:t>Click to edit Master subtitle style</a:t>
             </a:r>
-            <a:endParaRPr lang="en-IN"/>
-          </a:p>
-        </p:txBody>
-      </p:sp>
-      <p:sp>
-        <p:nvSpPr>
-          <p:cNvPr id="4" name="Date Placeholder 3">
-            <a:extLst>
-              <a:ext uri="{FF2B5EF4-FFF2-40B4-BE49-F238E27FC236}">
-                <a16:creationId xmlns:a16="http://schemas.microsoft.com/office/drawing/2014/main" id="{5BE81C00-19EA-1DC3-C4CA-3F1B80931D49}"/>
-              </a:ext>
-            </a:extLst>
-          </p:cNvPr>
+            <a:endParaRPr lang="en-US" dirty="0"/>
+          </a:p>
+        </p:txBody>
+      </p:sp>
+      <p:sp>
+        <p:nvSpPr>
+          <p:cNvPr id="4" name="Date Placeholder 3"/>
           <p:cNvSpPr>
             <a:spLocks noGrp="1"/>
           </p:cNvSpPr>
@@ -275,7 +867,7 @@
           <a:p>
             <a:fld id="{138BECAB-2E07-4D0D-9FD6-90C32D437B4E}" type="datetimeFigureOut">
               <a:rPr lang="en-IN" smtClean="0"/>
-              <a:t>25-07-2026</a:t>
+              <a:t>26-07-2026</a:t>
             </a:fld>
             <a:endParaRPr lang="en-IN"/>
           </a:p>
@@ -283,13 +875,7 @@
       </p:sp>
       <p:sp>
         <p:nvSpPr>
-          <p:cNvPr id="5" name="Footer Placeholder 4">
-            <a:extLst>
-              <a:ext uri="{FF2B5EF4-FFF2-40B4-BE49-F238E27FC236}">
-                <a16:creationId xmlns:a16="http://schemas.microsoft.com/office/drawing/2014/main" id="{B38CE1CA-914B-779F-5171-C9C9D72759BB}"/>
-              </a:ext>
-            </a:extLst>
-          </p:cNvPr>
+          <p:cNvPr id="5" name="Footer Placeholder 4"/>
           <p:cNvSpPr>
             <a:spLocks noGrp="1"/>
           </p:cNvSpPr>
@@ -308,13 +894,7 @@
       </p:sp>
       <p:sp>
         <p:nvSpPr>
-          <p:cNvPr id="6" name="Slide Number Placeholder 5">
-            <a:extLst>
-              <a:ext uri="{FF2B5EF4-FFF2-40B4-BE49-F238E27FC236}">
-                <a16:creationId xmlns:a16="http://schemas.microsoft.com/office/drawing/2014/main" id="{AC5BF8FD-E1FA-0525-CC06-4F5302528ADA}"/>
-              </a:ext>
-            </a:extLst>
-          </p:cNvPr>
+          <p:cNvPr id="6" name="Slide Number Placeholder 5"/>
           <p:cNvSpPr>
             <a:spLocks noGrp="1"/>
           </p:cNvSpPr>
@@ -338,7 +918,7 @@
     </p:spTree>
     <p:extLst>
       <p:ext uri="{BB962C8B-B14F-4D97-AF65-F5344CB8AC3E}">
-        <p14:creationId xmlns:p14="http://schemas.microsoft.com/office/powerpoint/2010/main" val="3699944505"/>
+        <p14:creationId xmlns:p14="http://schemas.microsoft.com/office/powerpoint/2010/main" val="4283281573"/>
       </p:ext>
     </p:extLst>
   </p:cSld>
@@ -367,13 +947,7 @@
       </p:grpSpPr>
       <p:sp>
         <p:nvSpPr>
-          <p:cNvPr id="2" name="Title 1">
-            <a:extLst>
-              <a:ext uri="{FF2B5EF4-FFF2-40B4-BE49-F238E27FC236}">
-                <a16:creationId xmlns:a16="http://schemas.microsoft.com/office/drawing/2014/main" id="{95C151B0-FAB2-6091-5A48-A152EA165A3E}"/>
-              </a:ext>
-            </a:extLst>
-          </p:cNvPr>
+          <p:cNvPr id="2" name="Title 1"/>
           <p:cNvSpPr>
             <a:spLocks noGrp="1"/>
           </p:cNvSpPr>
@@ -390,19 +964,13 @@
               <a:rPr lang="en-US"/>
               <a:t>Click to edit Master title style</a:t>
             </a:r>
-            <a:endParaRPr lang="en-IN"/>
-          </a:p>
-        </p:txBody>
-      </p:sp>
-      <p:sp>
-        <p:nvSpPr>
-          <p:cNvPr id="3" name="Vertical Text Placeholder 2">
-            <a:extLst>
-              <a:ext uri="{FF2B5EF4-FFF2-40B4-BE49-F238E27FC236}">
-                <a16:creationId xmlns:a16="http://schemas.microsoft.com/office/drawing/2014/main" id="{8CE42343-F624-6607-0DE4-29DDD76872EC}"/>
-              </a:ext>
-            </a:extLst>
-          </p:cNvPr>
+            <a:endParaRPr lang="en-US" dirty="0"/>
+          </a:p>
+        </p:txBody>
+      </p:sp>
+      <p:sp>
+        <p:nvSpPr>
+          <p:cNvPr id="3" name="Vertical Text Placeholder 2"/>
           <p:cNvSpPr>
             <a:spLocks noGrp="1"/>
           </p:cNvSpPr>
@@ -448,19 +1016,13 @@
               <a:rPr lang="en-US"/>
               <a:t>Fifth level</a:t>
             </a:r>
-            <a:endParaRPr lang="en-IN"/>
-          </a:p>
-        </p:txBody>
-      </p:sp>
-      <p:sp>
-        <p:nvSpPr>
-          <p:cNvPr id="4" name="Date Placeholder 3">
-            <a:extLst>
-              <a:ext uri="{FF2B5EF4-FFF2-40B4-BE49-F238E27FC236}">
-                <a16:creationId xmlns:a16="http://schemas.microsoft.com/office/drawing/2014/main" id="{B75219F2-DBF7-A607-0860-AC8A1D0097D1}"/>
-              </a:ext>
-            </a:extLst>
-          </p:cNvPr>
+            <a:endParaRPr lang="en-US" dirty="0"/>
+          </a:p>
+        </p:txBody>
+      </p:sp>
+      <p:sp>
+        <p:nvSpPr>
+          <p:cNvPr id="4" name="Date Placeholder 3"/>
           <p:cNvSpPr>
             <a:spLocks noGrp="1"/>
           </p:cNvSpPr>
@@ -475,7 +1037,7 @@
           <a:p>
             <a:fld id="{138BECAB-2E07-4D0D-9FD6-90C32D437B4E}" type="datetimeFigureOut">
               <a:rPr lang="en-IN" smtClean="0"/>
-              <a:t>25-07-2026</a:t>
+              <a:t>26-07-2026</a:t>
             </a:fld>
             <a:endParaRPr lang="en-IN"/>
           </a:p>
@@ -483,13 +1045,7 @@
       </p:sp>
       <p:sp>
         <p:nvSpPr>
-          <p:cNvPr id="5" name="Footer Placeholder 4">
-            <a:extLst>
-              <a:ext uri="{FF2B5EF4-FFF2-40B4-BE49-F238E27FC236}">
-                <a16:creationId xmlns:a16="http://schemas.microsoft.com/office/drawing/2014/main" id="{12C616F7-D3CF-9B62-B7AD-D366F188148C}"/>
-              </a:ext>
-            </a:extLst>
-          </p:cNvPr>
+          <p:cNvPr id="5" name="Footer Placeholder 4"/>
           <p:cNvSpPr>
             <a:spLocks noGrp="1"/>
           </p:cNvSpPr>
@@ -508,13 +1064,7 @@
       </p:sp>
       <p:sp>
         <p:nvSpPr>
-          <p:cNvPr id="6" name="Slide Number Placeholder 5">
-            <a:extLst>
-              <a:ext uri="{FF2B5EF4-FFF2-40B4-BE49-F238E27FC236}">
-                <a16:creationId xmlns:a16="http://schemas.microsoft.com/office/drawing/2014/main" id="{188B71E0-80BA-9CDF-27B2-E20822D30C0F}"/>
-              </a:ext>
-            </a:extLst>
-          </p:cNvPr>
+          <p:cNvPr id="6" name="Slide Number Placeholder 5"/>
           <p:cNvSpPr>
             <a:spLocks noGrp="1"/>
           </p:cNvSpPr>
@@ -538,7 +1088,7 @@
     </p:spTree>
     <p:extLst>
       <p:ext uri="{BB962C8B-B14F-4D97-AF65-F5344CB8AC3E}">
-        <p14:creationId xmlns:p14="http://schemas.microsoft.com/office/powerpoint/2010/main" val="1529674801"/>
+        <p14:creationId xmlns:p14="http://schemas.microsoft.com/office/powerpoint/2010/main" val="629533962"/>
       </p:ext>
     </p:extLst>
   </p:cSld>
@@ -567,13 +1117,7 @@
       </p:grpSpPr>
       <p:sp>
         <p:nvSpPr>
-          <p:cNvPr id="2" name="Vertical Title 1">
-            <a:extLst>
-              <a:ext uri="{FF2B5EF4-FFF2-40B4-BE49-F238E27FC236}">
-                <a16:creationId xmlns:a16="http://schemas.microsoft.com/office/drawing/2014/main" id="{175F2450-D16E-100B-A31A-2CDC60A0807D}"/>
-              </a:ext>
-            </a:extLst>
-          </p:cNvPr>
+          <p:cNvPr id="2" name="Vertical Title 1"/>
           <p:cNvSpPr>
             <a:spLocks noGrp="1"/>
           </p:cNvSpPr>
@@ -595,19 +1139,13 @@
               <a:rPr lang="en-US"/>
               <a:t>Click to edit Master title style</a:t>
             </a:r>
-            <a:endParaRPr lang="en-IN"/>
-          </a:p>
-        </p:txBody>
-      </p:sp>
-      <p:sp>
-        <p:nvSpPr>
-          <p:cNvPr id="3" name="Vertical Text Placeholder 2">
-            <a:extLst>
-              <a:ext uri="{FF2B5EF4-FFF2-40B4-BE49-F238E27FC236}">
-                <a16:creationId xmlns:a16="http://schemas.microsoft.com/office/drawing/2014/main" id="{A0B5F7FF-E342-CD8E-5FBF-E6D97808AC31}"/>
-              </a:ext>
-            </a:extLst>
-          </p:cNvPr>
+            <a:endParaRPr lang="en-US" dirty="0"/>
+          </a:p>
+        </p:txBody>
+      </p:sp>
+      <p:sp>
+        <p:nvSpPr>
+          <p:cNvPr id="3" name="Vertical Text Placeholder 2"/>
           <p:cNvSpPr>
             <a:spLocks noGrp="1"/>
           </p:cNvSpPr>
@@ -658,19 +1196,13 @@
               <a:rPr lang="en-US"/>
               <a:t>Fifth level</a:t>
             </a:r>
-            <a:endParaRPr lang="en-IN"/>
-          </a:p>
-        </p:txBody>
-      </p:sp>
-      <p:sp>
-        <p:nvSpPr>
-          <p:cNvPr id="4" name="Date Placeholder 3">
-            <a:extLst>
-              <a:ext uri="{FF2B5EF4-FFF2-40B4-BE49-F238E27FC236}">
-                <a16:creationId xmlns:a16="http://schemas.microsoft.com/office/drawing/2014/main" id="{DF5BFE15-B15B-1C26-1AFE-8E0AB7A39411}"/>
-              </a:ext>
-            </a:extLst>
-          </p:cNvPr>
+            <a:endParaRPr lang="en-US" dirty="0"/>
+          </a:p>
+        </p:txBody>
+      </p:sp>
+      <p:sp>
+        <p:nvSpPr>
+          <p:cNvPr id="4" name="Date Placeholder 3"/>
           <p:cNvSpPr>
             <a:spLocks noGrp="1"/>
           </p:cNvSpPr>
@@ -685,7 +1217,7 @@
           <a:p>
             <a:fld id="{138BECAB-2E07-4D0D-9FD6-90C32D437B4E}" type="datetimeFigureOut">
               <a:rPr lang="en-IN" smtClean="0"/>
-              <a:t>25-07-2026</a:t>
+              <a:t>26-07-2026</a:t>
             </a:fld>
             <a:endParaRPr lang="en-IN"/>
           </a:p>
@@ -693,13 +1225,7 @@
       </p:sp>
       <p:sp>
         <p:nvSpPr>
-          <p:cNvPr id="5" name="Footer Placeholder 4">
-            <a:extLst>
-              <a:ext uri="{FF2B5EF4-FFF2-40B4-BE49-F238E27FC236}">
-                <a16:creationId xmlns:a16="http://schemas.microsoft.com/office/drawing/2014/main" id="{23403882-AF93-66F4-59D2-8031BDACBD98}"/>
-              </a:ext>
-            </a:extLst>
-          </p:cNvPr>
+          <p:cNvPr id="5" name="Footer Placeholder 4"/>
           <p:cNvSpPr>
             <a:spLocks noGrp="1"/>
           </p:cNvSpPr>
@@ -718,13 +1244,7 @@
       </p:sp>
       <p:sp>
         <p:nvSpPr>
-          <p:cNvPr id="6" name="Slide Number Placeholder 5">
-            <a:extLst>
-              <a:ext uri="{FF2B5EF4-FFF2-40B4-BE49-F238E27FC236}">
-                <a16:creationId xmlns:a16="http://schemas.microsoft.com/office/drawing/2014/main" id="{B69B40C5-53C9-6F5D-B04D-2E02371D3176}"/>
-              </a:ext>
-            </a:extLst>
-          </p:cNvPr>
+          <p:cNvPr id="6" name="Slide Number Placeholder 5"/>
           <p:cNvSpPr>
             <a:spLocks noGrp="1"/>
           </p:cNvSpPr>
@@ -748,7 +1268,7 @@
     </p:spTree>
     <p:extLst>
       <p:ext uri="{BB962C8B-B14F-4D97-AF65-F5344CB8AC3E}">
-        <p14:creationId xmlns:p14="http://schemas.microsoft.com/office/powerpoint/2010/main" val="3933539174"/>
+        <p14:creationId xmlns:p14="http://schemas.microsoft.com/office/powerpoint/2010/main" val="327866790"/>
       </p:ext>
     </p:extLst>
   </p:cSld>
@@ -777,13 +1297,7 @@
       </p:grpSpPr>
       <p:sp>
         <p:nvSpPr>
-          <p:cNvPr id="2" name="Title 1">
-            <a:extLst>
-              <a:ext uri="{FF2B5EF4-FFF2-40B4-BE49-F238E27FC236}">
-                <a16:creationId xmlns:a16="http://schemas.microsoft.com/office/drawing/2014/main" id="{1EDE5533-5053-EC61-72B7-F739EC4AF7AB}"/>
-              </a:ext>
-            </a:extLst>
-          </p:cNvPr>
+          <p:cNvPr id="2" name="Title 1"/>
           <p:cNvSpPr>
             <a:spLocks noGrp="1"/>
           </p:cNvSpPr>
@@ -800,19 +1314,13 @@
               <a:rPr lang="en-US"/>
               <a:t>Click to edit Master title style</a:t>
             </a:r>
-            <a:endParaRPr lang="en-IN"/>
-          </a:p>
-        </p:txBody>
-      </p:sp>
-      <p:sp>
-        <p:nvSpPr>
-          <p:cNvPr id="3" name="Content Placeholder 2">
-            <a:extLst>
-              <a:ext uri="{FF2B5EF4-FFF2-40B4-BE49-F238E27FC236}">
-                <a16:creationId xmlns:a16="http://schemas.microsoft.com/office/drawing/2014/main" id="{8FAA564B-539D-4896-9391-B4AD2FF11F6F}"/>
-              </a:ext>
-            </a:extLst>
-          </p:cNvPr>
+            <a:endParaRPr lang="en-US" dirty="0"/>
+          </a:p>
+        </p:txBody>
+      </p:sp>
+      <p:sp>
+        <p:nvSpPr>
+          <p:cNvPr id="3" name="Content Placeholder 2"/>
           <p:cNvSpPr>
             <a:spLocks noGrp="1"/>
           </p:cNvSpPr>
@@ -858,19 +1366,13 @@
               <a:rPr lang="en-US"/>
               <a:t>Fifth level</a:t>
             </a:r>
-            <a:endParaRPr lang="en-IN"/>
-          </a:p>
-        </p:txBody>
-      </p:sp>
-      <p:sp>
-        <p:nvSpPr>
-          <p:cNvPr id="4" name="Date Placeholder 3">
-            <a:extLst>
-              <a:ext uri="{FF2B5EF4-FFF2-40B4-BE49-F238E27FC236}">
-                <a16:creationId xmlns:a16="http://schemas.microsoft.com/office/drawing/2014/main" id="{A9049444-2198-C7BB-BA7C-E6A0DF708E65}"/>
-              </a:ext>
-            </a:extLst>
-          </p:cNvPr>
+            <a:endParaRPr lang="en-US" dirty="0"/>
+          </a:p>
+        </p:txBody>
+      </p:sp>
+      <p:sp>
+        <p:nvSpPr>
+          <p:cNvPr id="4" name="Date Placeholder 3"/>
           <p:cNvSpPr>
             <a:spLocks noGrp="1"/>
           </p:cNvSpPr>
@@ -885,7 +1387,7 @@
           <a:p>
             <a:fld id="{138BECAB-2E07-4D0D-9FD6-90C32D437B4E}" type="datetimeFigureOut">
               <a:rPr lang="en-IN" smtClean="0"/>
-              <a:t>25-07-2026</a:t>
+              <a:t>26-07-2026</a:t>
             </a:fld>
             <a:endParaRPr lang="en-IN"/>
           </a:p>
@@ -893,13 +1395,7 @@
       </p:sp>
       <p:sp>
         <p:nvSpPr>
-          <p:cNvPr id="5" name="Footer Placeholder 4">
-            <a:extLst>
-              <a:ext uri="{FF2B5EF4-FFF2-40B4-BE49-F238E27FC236}">
-                <a16:creationId xmlns:a16="http://schemas.microsoft.com/office/drawing/2014/main" id="{1220FA42-46EB-C885-018B-E8D19A1CFF65}"/>
-              </a:ext>
-            </a:extLst>
-          </p:cNvPr>
+          <p:cNvPr id="5" name="Footer Placeholder 4"/>
           <p:cNvSpPr>
             <a:spLocks noGrp="1"/>
           </p:cNvSpPr>
@@ -918,13 +1414,7 @@
       </p:sp>
       <p:sp>
         <p:nvSpPr>
-          <p:cNvPr id="6" name="Slide Number Placeholder 5">
-            <a:extLst>
-              <a:ext uri="{FF2B5EF4-FFF2-40B4-BE49-F238E27FC236}">
-                <a16:creationId xmlns:a16="http://schemas.microsoft.com/office/drawing/2014/main" id="{FAAD0A6A-4FD6-E7A2-5DED-6232B7468ADA}"/>
-              </a:ext>
-            </a:extLst>
-          </p:cNvPr>
+          <p:cNvPr id="6" name="Slide Number Placeholder 5"/>
           <p:cNvSpPr>
             <a:spLocks noGrp="1"/>
           </p:cNvSpPr>
@@ -948,7 +1438,7 @@
     </p:spTree>
     <p:extLst>
       <p:ext uri="{BB962C8B-B14F-4D97-AF65-F5344CB8AC3E}">
-        <p14:creationId xmlns:p14="http://schemas.microsoft.com/office/powerpoint/2010/main" val="1855840464"/>
+        <p14:creationId xmlns:p14="http://schemas.microsoft.com/office/powerpoint/2010/main" val="762851704"/>
       </p:ext>
     </p:extLst>
   </p:cSld>
@@ -977,13 +1467,7 @@
       </p:grpSpPr>
       <p:sp>
         <p:nvSpPr>
-          <p:cNvPr id="2" name="Title 1">
-            <a:extLst>
-              <a:ext uri="{FF2B5EF4-FFF2-40B4-BE49-F238E27FC236}">
-                <a16:creationId xmlns:a16="http://schemas.microsoft.com/office/drawing/2014/main" id="{07D3FADB-2F1F-6116-73FF-ECFC29A4EA3F}"/>
-              </a:ext>
-            </a:extLst>
-          </p:cNvPr>
+          <p:cNvPr id="2" name="Title 1"/>
           <p:cNvSpPr>
             <a:spLocks noGrp="1"/>
           </p:cNvSpPr>
@@ -1009,19 +1493,13 @@
               <a:rPr lang="en-US"/>
               <a:t>Click to edit Master title style</a:t>
             </a:r>
-            <a:endParaRPr lang="en-IN"/>
-          </a:p>
-        </p:txBody>
-      </p:sp>
-      <p:sp>
-        <p:nvSpPr>
-          <p:cNvPr id="3" name="Text Placeholder 2">
-            <a:extLst>
-              <a:ext uri="{FF2B5EF4-FFF2-40B4-BE49-F238E27FC236}">
-                <a16:creationId xmlns:a16="http://schemas.microsoft.com/office/drawing/2014/main" id="{9DE26770-9277-D2D9-B0CF-DE30120113EE}"/>
-              </a:ext>
-            </a:extLst>
-          </p:cNvPr>
+            <a:endParaRPr lang="en-US" dirty="0"/>
+          </a:p>
+        </p:txBody>
+      </p:sp>
+      <p:sp>
+        <p:nvSpPr>
+          <p:cNvPr id="3" name="Text Placeholder 2"/>
           <p:cNvSpPr>
             <a:spLocks noGrp="1"/>
           </p:cNvSpPr>
@@ -1043,7 +1521,7 @@
               <a:defRPr sz="2400">
                 <a:solidFill>
                   <a:schemeClr val="tx1">
-                    <a:tint val="82000"/>
+                    <a:shade val="82000"/>
                   </a:schemeClr>
                 </a:solidFill>
               </a:defRPr>
@@ -1053,7 +1531,7 @@
               <a:defRPr sz="2000">
                 <a:solidFill>
                   <a:schemeClr val="tx1">
-                    <a:tint val="82000"/>
+                    <a:shade val="82000"/>
                   </a:schemeClr>
                 </a:solidFill>
               </a:defRPr>
@@ -1063,7 +1541,7 @@
               <a:defRPr sz="1800">
                 <a:solidFill>
                   <a:schemeClr val="tx1">
-                    <a:tint val="82000"/>
+                    <a:shade val="82000"/>
                   </a:schemeClr>
                 </a:solidFill>
               </a:defRPr>
@@ -1073,7 +1551,7 @@
               <a:defRPr sz="1600">
                 <a:solidFill>
                   <a:schemeClr val="tx1">
-                    <a:tint val="82000"/>
+                    <a:shade val="82000"/>
                   </a:schemeClr>
                 </a:solidFill>
               </a:defRPr>
@@ -1083,7 +1561,7 @@
               <a:defRPr sz="1600">
                 <a:solidFill>
                   <a:schemeClr val="tx1">
-                    <a:tint val="82000"/>
+                    <a:shade val="82000"/>
                   </a:schemeClr>
                 </a:solidFill>
               </a:defRPr>
@@ -1093,7 +1571,7 @@
               <a:defRPr sz="1600">
                 <a:solidFill>
                   <a:schemeClr val="tx1">
-                    <a:tint val="82000"/>
+                    <a:shade val="82000"/>
                   </a:schemeClr>
                 </a:solidFill>
               </a:defRPr>
@@ -1103,7 +1581,7 @@
               <a:defRPr sz="1600">
                 <a:solidFill>
                   <a:schemeClr val="tx1">
-                    <a:tint val="82000"/>
+                    <a:shade val="82000"/>
                   </a:schemeClr>
                 </a:solidFill>
               </a:defRPr>
@@ -1113,7 +1591,7 @@
               <a:defRPr sz="1600">
                 <a:solidFill>
                   <a:schemeClr val="tx1">
-                    <a:tint val="82000"/>
+                    <a:shade val="82000"/>
                   </a:schemeClr>
                 </a:solidFill>
               </a:defRPr>
@@ -1123,7 +1601,7 @@
               <a:defRPr sz="1600">
                 <a:solidFill>
                   <a:schemeClr val="tx1">
-                    <a:tint val="82000"/>
+                    <a:shade val="82000"/>
                   </a:schemeClr>
                 </a:solidFill>
               </a:defRPr>
@@ -1140,13 +1618,7 @@
       </p:sp>
       <p:sp>
         <p:nvSpPr>
-          <p:cNvPr id="4" name="Date Placeholder 3">
-            <a:extLst>
-              <a:ext uri="{FF2B5EF4-FFF2-40B4-BE49-F238E27FC236}">
-                <a16:creationId xmlns:a16="http://schemas.microsoft.com/office/drawing/2014/main" id="{F99C5BF8-F4C2-62B9-99CF-B22B10C74177}"/>
-              </a:ext>
-            </a:extLst>
-          </p:cNvPr>
+          <p:cNvPr id="4" name="Date Placeholder 3"/>
           <p:cNvSpPr>
             <a:spLocks noGrp="1"/>
           </p:cNvSpPr>
@@ -1161,7 +1633,7 @@
           <a:p>
             <a:fld id="{138BECAB-2E07-4D0D-9FD6-90C32D437B4E}" type="datetimeFigureOut">
               <a:rPr lang="en-IN" smtClean="0"/>
-              <a:t>25-07-2026</a:t>
+              <a:t>26-07-2026</a:t>
             </a:fld>
             <a:endParaRPr lang="en-IN"/>
           </a:p>
@@ -1169,13 +1641,7 @@
       </p:sp>
       <p:sp>
         <p:nvSpPr>
-          <p:cNvPr id="5" name="Footer Placeholder 4">
-            <a:extLst>
-              <a:ext uri="{FF2B5EF4-FFF2-40B4-BE49-F238E27FC236}">
-                <a16:creationId xmlns:a16="http://schemas.microsoft.com/office/drawing/2014/main" id="{AE62C1F4-02E2-1785-1A8F-84DBDB4B4431}"/>
-              </a:ext>
-            </a:extLst>
-          </p:cNvPr>
+          <p:cNvPr id="5" name="Footer Placeholder 4"/>
           <p:cNvSpPr>
             <a:spLocks noGrp="1"/>
           </p:cNvSpPr>
@@ -1194,13 +1660,7 @@
       </p:sp>
       <p:sp>
         <p:nvSpPr>
-          <p:cNvPr id="6" name="Slide Number Placeholder 5">
-            <a:extLst>
-              <a:ext uri="{FF2B5EF4-FFF2-40B4-BE49-F238E27FC236}">
-                <a16:creationId xmlns:a16="http://schemas.microsoft.com/office/drawing/2014/main" id="{8E1250B0-255B-E4DD-37A4-35D0D17588D9}"/>
-              </a:ext>
-            </a:extLst>
-          </p:cNvPr>
+          <p:cNvPr id="6" name="Slide Number Placeholder 5"/>
           <p:cNvSpPr>
             <a:spLocks noGrp="1"/>
           </p:cNvSpPr>
@@ -1224,7 +1684,7 @@
     </p:spTree>
     <p:extLst>
       <p:ext uri="{BB962C8B-B14F-4D97-AF65-F5344CB8AC3E}">
-        <p14:creationId xmlns:p14="http://schemas.microsoft.com/office/powerpoint/2010/main" val="1888100766"/>
+        <p14:creationId xmlns:p14="http://schemas.microsoft.com/office/powerpoint/2010/main" val="2595851909"/>
       </p:ext>
     </p:extLst>
   </p:cSld>
@@ -1253,13 +1713,7 @@
       </p:grpSpPr>
       <p:sp>
         <p:nvSpPr>
-          <p:cNvPr id="2" name="Title 1">
-            <a:extLst>
-              <a:ext uri="{FF2B5EF4-FFF2-40B4-BE49-F238E27FC236}">
-                <a16:creationId xmlns:a16="http://schemas.microsoft.com/office/drawing/2014/main" id="{03676E98-2EBC-37F2-AA84-9F7047C579AE}"/>
-              </a:ext>
-            </a:extLst>
-          </p:cNvPr>
+          <p:cNvPr id="2" name="Title 1"/>
           <p:cNvSpPr>
             <a:spLocks noGrp="1"/>
           </p:cNvSpPr>
@@ -1276,19 +1730,13 @@
               <a:rPr lang="en-US"/>
               <a:t>Click to edit Master title style</a:t>
             </a:r>
-            <a:endParaRPr lang="en-IN"/>
-          </a:p>
-        </p:txBody>
-      </p:sp>
-      <p:sp>
-        <p:nvSpPr>
-          <p:cNvPr id="3" name="Content Placeholder 2">
-            <a:extLst>
-              <a:ext uri="{FF2B5EF4-FFF2-40B4-BE49-F238E27FC236}">
-                <a16:creationId xmlns:a16="http://schemas.microsoft.com/office/drawing/2014/main" id="{DDC99851-2F4C-1C14-8A25-521B90AD0DA9}"/>
-              </a:ext>
-            </a:extLst>
-          </p:cNvPr>
+            <a:endParaRPr lang="en-US" dirty="0"/>
+          </a:p>
+        </p:txBody>
+      </p:sp>
+      <p:sp>
+        <p:nvSpPr>
+          <p:cNvPr id="3" name="Content Placeholder 2"/>
           <p:cNvSpPr>
             <a:spLocks noGrp="1"/>
           </p:cNvSpPr>
@@ -1339,19 +1787,13 @@
               <a:rPr lang="en-US"/>
               <a:t>Fifth level</a:t>
             </a:r>
-            <a:endParaRPr lang="en-IN"/>
-          </a:p>
-        </p:txBody>
-      </p:sp>
-      <p:sp>
-        <p:nvSpPr>
-          <p:cNvPr id="4" name="Content Placeholder 3">
-            <a:extLst>
-              <a:ext uri="{FF2B5EF4-FFF2-40B4-BE49-F238E27FC236}">
-                <a16:creationId xmlns:a16="http://schemas.microsoft.com/office/drawing/2014/main" id="{771FA498-E9DF-E80B-DDEA-67A13106D536}"/>
-              </a:ext>
-            </a:extLst>
-          </p:cNvPr>
+            <a:endParaRPr lang="en-US" dirty="0"/>
+          </a:p>
+        </p:txBody>
+      </p:sp>
+      <p:sp>
+        <p:nvSpPr>
+          <p:cNvPr id="4" name="Content Placeholder 3"/>
           <p:cNvSpPr>
             <a:spLocks noGrp="1"/>
           </p:cNvSpPr>
@@ -1402,19 +1844,13 @@
               <a:rPr lang="en-US"/>
               <a:t>Fifth level</a:t>
             </a:r>
-            <a:endParaRPr lang="en-IN"/>
-          </a:p>
-        </p:txBody>
-      </p:sp>
-      <p:sp>
-        <p:nvSpPr>
-          <p:cNvPr id="5" name="Date Placeholder 4">
-            <a:extLst>
-              <a:ext uri="{FF2B5EF4-FFF2-40B4-BE49-F238E27FC236}">
-                <a16:creationId xmlns:a16="http://schemas.microsoft.com/office/drawing/2014/main" id="{51960AB5-9BA1-57CF-6253-EED5BB1D1DC9}"/>
-              </a:ext>
-            </a:extLst>
-          </p:cNvPr>
+            <a:endParaRPr lang="en-US" dirty="0"/>
+          </a:p>
+        </p:txBody>
+      </p:sp>
+      <p:sp>
+        <p:nvSpPr>
+          <p:cNvPr id="5" name="Date Placeholder 4"/>
           <p:cNvSpPr>
             <a:spLocks noGrp="1"/>
           </p:cNvSpPr>
@@ -1429,7 +1865,7 @@
           <a:p>
             <a:fld id="{138BECAB-2E07-4D0D-9FD6-90C32D437B4E}" type="datetimeFigureOut">
               <a:rPr lang="en-IN" smtClean="0"/>
-              <a:t>25-07-2026</a:t>
+              <a:t>26-07-2026</a:t>
             </a:fld>
             <a:endParaRPr lang="en-IN"/>
           </a:p>
@@ -1437,13 +1873,7 @@
       </p:sp>
       <p:sp>
         <p:nvSpPr>
-          <p:cNvPr id="6" name="Footer Placeholder 5">
-            <a:extLst>
-              <a:ext uri="{FF2B5EF4-FFF2-40B4-BE49-F238E27FC236}">
-                <a16:creationId xmlns:a16="http://schemas.microsoft.com/office/drawing/2014/main" id="{D7CF3088-3CB5-9F73-6837-81B525B1BF7A}"/>
-              </a:ext>
-            </a:extLst>
-          </p:cNvPr>
+          <p:cNvPr id="6" name="Footer Placeholder 5"/>
           <p:cNvSpPr>
             <a:spLocks noGrp="1"/>
           </p:cNvSpPr>
@@ -1462,13 +1892,7 @@
       </p:sp>
       <p:sp>
         <p:nvSpPr>
-          <p:cNvPr id="7" name="Slide Number Placeholder 6">
-            <a:extLst>
-              <a:ext uri="{FF2B5EF4-FFF2-40B4-BE49-F238E27FC236}">
-                <a16:creationId xmlns:a16="http://schemas.microsoft.com/office/drawing/2014/main" id="{88912C00-E261-0361-03A1-1F8B1213D05B}"/>
-              </a:ext>
-            </a:extLst>
-          </p:cNvPr>
+          <p:cNvPr id="7" name="Slide Number Placeholder 6"/>
           <p:cNvSpPr>
             <a:spLocks noGrp="1"/>
           </p:cNvSpPr>
@@ -1492,7 +1916,7 @@
     </p:spTree>
     <p:extLst>
       <p:ext uri="{BB962C8B-B14F-4D97-AF65-F5344CB8AC3E}">
-        <p14:creationId xmlns:p14="http://schemas.microsoft.com/office/powerpoint/2010/main" val="153571354"/>
+        <p14:creationId xmlns:p14="http://schemas.microsoft.com/office/powerpoint/2010/main" val="2048043216"/>
       </p:ext>
     </p:extLst>
   </p:cSld>
@@ -1521,13 +1945,7 @@
       </p:grpSpPr>
       <p:sp>
         <p:nvSpPr>
-          <p:cNvPr id="2" name="Title 1">
-            <a:extLst>
-              <a:ext uri="{FF2B5EF4-FFF2-40B4-BE49-F238E27FC236}">
-                <a16:creationId xmlns:a16="http://schemas.microsoft.com/office/drawing/2014/main" id="{2C1707F3-9DD8-BF9F-B696-C4FEB352C3E2}"/>
-              </a:ext>
-            </a:extLst>
-          </p:cNvPr>
+          <p:cNvPr id="2" name="Title 1"/>
           <p:cNvSpPr>
             <a:spLocks noGrp="1"/>
           </p:cNvSpPr>
@@ -1549,19 +1967,13 @@
               <a:rPr lang="en-US"/>
               <a:t>Click to edit Master title style</a:t>
             </a:r>
-            <a:endParaRPr lang="en-IN"/>
-          </a:p>
-        </p:txBody>
-      </p:sp>
-      <p:sp>
-        <p:nvSpPr>
-          <p:cNvPr id="3" name="Text Placeholder 2">
-            <a:extLst>
-              <a:ext uri="{FF2B5EF4-FFF2-40B4-BE49-F238E27FC236}">
-                <a16:creationId xmlns:a16="http://schemas.microsoft.com/office/drawing/2014/main" id="{CAC73E5E-7D02-B953-EE7A-A2C52A5B30C6}"/>
-              </a:ext>
-            </a:extLst>
-          </p:cNvPr>
+            <a:endParaRPr lang="en-US" dirty="0"/>
+          </a:p>
+        </p:txBody>
+      </p:sp>
+      <p:sp>
+        <p:nvSpPr>
+          <p:cNvPr id="3" name="Text Placeholder 2"/>
           <p:cNvSpPr>
             <a:spLocks noGrp="1"/>
           </p:cNvSpPr>
@@ -1626,13 +2038,7 @@
       </p:sp>
       <p:sp>
         <p:nvSpPr>
-          <p:cNvPr id="4" name="Content Placeholder 3">
-            <a:extLst>
-              <a:ext uri="{FF2B5EF4-FFF2-40B4-BE49-F238E27FC236}">
-                <a16:creationId xmlns:a16="http://schemas.microsoft.com/office/drawing/2014/main" id="{11805469-1153-D140-7180-1F767E4DFEE2}"/>
-              </a:ext>
-            </a:extLst>
-          </p:cNvPr>
+          <p:cNvPr id="4" name="Content Placeholder 3"/>
           <p:cNvSpPr>
             <a:spLocks noGrp="1"/>
           </p:cNvSpPr>
@@ -1683,19 +2089,13 @@
               <a:rPr lang="en-US"/>
               <a:t>Fifth level</a:t>
             </a:r>
-            <a:endParaRPr lang="en-IN"/>
-          </a:p>
-        </p:txBody>
-      </p:sp>
-      <p:sp>
-        <p:nvSpPr>
-          <p:cNvPr id="5" name="Text Placeholder 4">
-            <a:extLst>
-              <a:ext uri="{FF2B5EF4-FFF2-40B4-BE49-F238E27FC236}">
-                <a16:creationId xmlns:a16="http://schemas.microsoft.com/office/drawing/2014/main" id="{1EBC649C-C748-BF13-9126-211998A83C7C}"/>
-              </a:ext>
-            </a:extLst>
-          </p:cNvPr>
+            <a:endParaRPr lang="en-US" dirty="0"/>
+          </a:p>
+        </p:txBody>
+      </p:sp>
+      <p:sp>
+        <p:nvSpPr>
+          <p:cNvPr id="5" name="Text Placeholder 4"/>
           <p:cNvSpPr>
             <a:spLocks noGrp="1"/>
           </p:cNvSpPr>
@@ -1760,13 +2160,7 @@
       </p:sp>
       <p:sp>
         <p:nvSpPr>
-          <p:cNvPr id="6" name="Content Placeholder 5">
-            <a:extLst>
-              <a:ext uri="{FF2B5EF4-FFF2-40B4-BE49-F238E27FC236}">
-                <a16:creationId xmlns:a16="http://schemas.microsoft.com/office/drawing/2014/main" id="{50D28B98-B165-ABA9-3034-E9CEDBFC1103}"/>
-              </a:ext>
-            </a:extLst>
-          </p:cNvPr>
+          <p:cNvPr id="6" name="Content Placeholder 5"/>
           <p:cNvSpPr>
             <a:spLocks noGrp="1"/>
           </p:cNvSpPr>
@@ -1817,19 +2211,13 @@
               <a:rPr lang="en-US"/>
               <a:t>Fifth level</a:t>
             </a:r>
-            <a:endParaRPr lang="en-IN"/>
-          </a:p>
-        </p:txBody>
-      </p:sp>
-      <p:sp>
-        <p:nvSpPr>
-          <p:cNvPr id="7" name="Date Placeholder 6">
-            <a:extLst>
-              <a:ext uri="{FF2B5EF4-FFF2-40B4-BE49-F238E27FC236}">
-                <a16:creationId xmlns:a16="http://schemas.microsoft.com/office/drawing/2014/main" id="{BB980D54-780D-46FA-AADE-B6449B3F003F}"/>
-              </a:ext>
-            </a:extLst>
-          </p:cNvPr>
+            <a:endParaRPr lang="en-US" dirty="0"/>
+          </a:p>
+        </p:txBody>
+      </p:sp>
+      <p:sp>
+        <p:nvSpPr>
+          <p:cNvPr id="7" name="Date Placeholder 6"/>
           <p:cNvSpPr>
             <a:spLocks noGrp="1"/>
           </p:cNvSpPr>
@@ -1844,7 +2232,7 @@
           <a:p>
             <a:fld id="{138BECAB-2E07-4D0D-9FD6-90C32D437B4E}" type="datetimeFigureOut">
               <a:rPr lang="en-IN" smtClean="0"/>
-              <a:t>25-07-2026</a:t>
+              <a:t>26-07-2026</a:t>
             </a:fld>
             <a:endParaRPr lang="en-IN"/>
           </a:p>
@@ -1852,13 +2240,7 @@
       </p:sp>
       <p:sp>
         <p:nvSpPr>
-          <p:cNvPr id="8" name="Footer Placeholder 7">
-            <a:extLst>
-              <a:ext uri="{FF2B5EF4-FFF2-40B4-BE49-F238E27FC236}">
-                <a16:creationId xmlns:a16="http://schemas.microsoft.com/office/drawing/2014/main" id="{3A9D1FAB-4098-0F0D-D7C0-C8BA30350DD7}"/>
-              </a:ext>
-            </a:extLst>
-          </p:cNvPr>
+          <p:cNvPr id="8" name="Footer Placeholder 7"/>
           <p:cNvSpPr>
             <a:spLocks noGrp="1"/>
           </p:cNvSpPr>
@@ -1877,13 +2259,7 @@
       </p:sp>
       <p:sp>
         <p:nvSpPr>
-          <p:cNvPr id="9" name="Slide Number Placeholder 8">
-            <a:extLst>
-              <a:ext uri="{FF2B5EF4-FFF2-40B4-BE49-F238E27FC236}">
-                <a16:creationId xmlns:a16="http://schemas.microsoft.com/office/drawing/2014/main" id="{A5788ED1-3695-631C-0174-70002D531FDB}"/>
-              </a:ext>
-            </a:extLst>
-          </p:cNvPr>
+          <p:cNvPr id="9" name="Slide Number Placeholder 8"/>
           <p:cNvSpPr>
             <a:spLocks noGrp="1"/>
           </p:cNvSpPr>
@@ -1907,7 +2283,7 @@
     </p:spTree>
     <p:extLst>
       <p:ext uri="{BB962C8B-B14F-4D97-AF65-F5344CB8AC3E}">
-        <p14:creationId xmlns:p14="http://schemas.microsoft.com/office/powerpoint/2010/main" val="338669912"/>
+        <p14:creationId xmlns:p14="http://schemas.microsoft.com/office/powerpoint/2010/main" val="1541793132"/>
       </p:ext>
     </p:extLst>
   </p:cSld>
@@ -1936,13 +2312,7 @@
       </p:grpSpPr>
       <p:sp>
         <p:nvSpPr>
-          <p:cNvPr id="2" name="Title 1">
-            <a:extLst>
-              <a:ext uri="{FF2B5EF4-FFF2-40B4-BE49-F238E27FC236}">
-                <a16:creationId xmlns:a16="http://schemas.microsoft.com/office/drawing/2014/main" id="{61FD13FC-6A2F-1A67-6CEA-7DB19ECFE9D0}"/>
-              </a:ext>
-            </a:extLst>
-          </p:cNvPr>
+          <p:cNvPr id="2" name="Title 1"/>
           <p:cNvSpPr>
             <a:spLocks noGrp="1"/>
           </p:cNvSpPr>
@@ -1959,19 +2329,13 @@
               <a:rPr lang="en-US"/>
               <a:t>Click to edit Master title style</a:t>
             </a:r>
-            <a:endParaRPr lang="en-IN"/>
-          </a:p>
-        </p:txBody>
-      </p:sp>
-      <p:sp>
-        <p:nvSpPr>
-          <p:cNvPr id="3" name="Date Placeholder 2">
-            <a:extLst>
-              <a:ext uri="{FF2B5EF4-FFF2-40B4-BE49-F238E27FC236}">
-                <a16:creationId xmlns:a16="http://schemas.microsoft.com/office/drawing/2014/main" id="{34AF2A73-E93E-642E-CB73-4E4F372FBA12}"/>
-              </a:ext>
-            </a:extLst>
-          </p:cNvPr>
+            <a:endParaRPr lang="en-US" dirty="0"/>
+          </a:p>
+        </p:txBody>
+      </p:sp>
+      <p:sp>
+        <p:nvSpPr>
+          <p:cNvPr id="3" name="Date Placeholder 2"/>
           <p:cNvSpPr>
             <a:spLocks noGrp="1"/>
           </p:cNvSpPr>
@@ -1986,7 +2350,7 @@
           <a:p>
             <a:fld id="{138BECAB-2E07-4D0D-9FD6-90C32D437B4E}" type="datetimeFigureOut">
               <a:rPr lang="en-IN" smtClean="0"/>
-              <a:t>25-07-2026</a:t>
+              <a:t>26-07-2026</a:t>
             </a:fld>
             <a:endParaRPr lang="en-IN"/>
           </a:p>
@@ -1994,13 +2358,7 @@
       </p:sp>
       <p:sp>
         <p:nvSpPr>
-          <p:cNvPr id="4" name="Footer Placeholder 3">
-            <a:extLst>
-              <a:ext uri="{FF2B5EF4-FFF2-40B4-BE49-F238E27FC236}">
-                <a16:creationId xmlns:a16="http://schemas.microsoft.com/office/drawing/2014/main" id="{1D1C6454-1B0D-9D4F-88A8-C48E3877C8FF}"/>
-              </a:ext>
-            </a:extLst>
-          </p:cNvPr>
+          <p:cNvPr id="4" name="Footer Placeholder 3"/>
           <p:cNvSpPr>
             <a:spLocks noGrp="1"/>
           </p:cNvSpPr>
@@ -2019,13 +2377,7 @@
       </p:sp>
       <p:sp>
         <p:nvSpPr>
-          <p:cNvPr id="5" name="Slide Number Placeholder 4">
-            <a:extLst>
-              <a:ext uri="{FF2B5EF4-FFF2-40B4-BE49-F238E27FC236}">
-                <a16:creationId xmlns:a16="http://schemas.microsoft.com/office/drawing/2014/main" id="{75E8227D-B6DA-7AC2-B026-9E1A869041C2}"/>
-              </a:ext>
-            </a:extLst>
-          </p:cNvPr>
+          <p:cNvPr id="5" name="Slide Number Placeholder 4"/>
           <p:cNvSpPr>
             <a:spLocks noGrp="1"/>
           </p:cNvSpPr>
@@ -2049,7 +2401,7 @@
     </p:spTree>
     <p:extLst>
       <p:ext uri="{BB962C8B-B14F-4D97-AF65-F5344CB8AC3E}">
-        <p14:creationId xmlns:p14="http://schemas.microsoft.com/office/powerpoint/2010/main" val="21538523"/>
+        <p14:creationId xmlns:p14="http://schemas.microsoft.com/office/powerpoint/2010/main" val="1052085498"/>
       </p:ext>
     </p:extLst>
   </p:cSld>
@@ -2078,13 +2430,7 @@
       </p:grpSpPr>
       <p:sp>
         <p:nvSpPr>
-          <p:cNvPr id="2" name="Date Placeholder 1">
-            <a:extLst>
-              <a:ext uri="{FF2B5EF4-FFF2-40B4-BE49-F238E27FC236}">
-                <a16:creationId xmlns:a16="http://schemas.microsoft.com/office/drawing/2014/main" id="{3645213A-217C-DD6A-096B-3F1F0A91154F}"/>
-              </a:ext>
-            </a:extLst>
-          </p:cNvPr>
+          <p:cNvPr id="2" name="Date Placeholder 1"/>
           <p:cNvSpPr>
             <a:spLocks noGrp="1"/>
           </p:cNvSpPr>
@@ -2099,7 +2445,7 @@
           <a:p>
             <a:fld id="{138BECAB-2E07-4D0D-9FD6-90C32D437B4E}" type="datetimeFigureOut">
               <a:rPr lang="en-IN" smtClean="0"/>
-              <a:t>25-07-2026</a:t>
+              <a:t>26-07-2026</a:t>
             </a:fld>
             <a:endParaRPr lang="en-IN"/>
           </a:p>
@@ -2107,13 +2453,7 @@
       </p:sp>
       <p:sp>
         <p:nvSpPr>
-          <p:cNvPr id="3" name="Footer Placeholder 2">
-            <a:extLst>
-              <a:ext uri="{FF2B5EF4-FFF2-40B4-BE49-F238E27FC236}">
-                <a16:creationId xmlns:a16="http://schemas.microsoft.com/office/drawing/2014/main" id="{AE2D7089-89E2-307A-A984-FA9C62DE74ED}"/>
-              </a:ext>
-            </a:extLst>
-          </p:cNvPr>
+          <p:cNvPr id="3" name="Footer Placeholder 2"/>
           <p:cNvSpPr>
             <a:spLocks noGrp="1"/>
           </p:cNvSpPr>
@@ -2132,13 +2472,7 @@
       </p:sp>
       <p:sp>
         <p:nvSpPr>
-          <p:cNvPr id="4" name="Slide Number Placeholder 3">
-            <a:extLst>
-              <a:ext uri="{FF2B5EF4-FFF2-40B4-BE49-F238E27FC236}">
-                <a16:creationId xmlns:a16="http://schemas.microsoft.com/office/drawing/2014/main" id="{AB02ED38-3E60-FDB0-30BA-E3C412E00850}"/>
-              </a:ext>
-            </a:extLst>
-          </p:cNvPr>
+          <p:cNvPr id="4" name="Slide Number Placeholder 3"/>
           <p:cNvSpPr>
             <a:spLocks noGrp="1"/>
           </p:cNvSpPr>
@@ -2162,7 +2496,7 @@
     </p:spTree>
     <p:extLst>
       <p:ext uri="{BB962C8B-B14F-4D97-AF65-F5344CB8AC3E}">
-        <p14:creationId xmlns:p14="http://schemas.microsoft.com/office/powerpoint/2010/main" val="3695262072"/>
+        <p14:creationId xmlns:p14="http://schemas.microsoft.com/office/powerpoint/2010/main" val="2856255769"/>
       </p:ext>
     </p:extLst>
   </p:cSld>
@@ -2191,13 +2525,7 @@
       </p:grpSpPr>
       <p:sp>
         <p:nvSpPr>
-          <p:cNvPr id="2" name="Title 1">
-            <a:extLst>
-              <a:ext uri="{FF2B5EF4-FFF2-40B4-BE49-F238E27FC236}">
-                <a16:creationId xmlns:a16="http://schemas.microsoft.com/office/drawing/2014/main" id="{469DDDE2-0E80-3155-5B81-341289D975BC}"/>
-              </a:ext>
-            </a:extLst>
-          </p:cNvPr>
+          <p:cNvPr id="2" name="Title 1"/>
           <p:cNvSpPr>
             <a:spLocks noGrp="1"/>
           </p:cNvSpPr>
@@ -2223,19 +2551,13 @@
               <a:rPr lang="en-US"/>
               <a:t>Click to edit Master title style</a:t>
             </a:r>
-            <a:endParaRPr lang="en-IN"/>
-          </a:p>
-        </p:txBody>
-      </p:sp>
-      <p:sp>
-        <p:nvSpPr>
-          <p:cNvPr id="3" name="Content Placeholder 2">
-            <a:extLst>
-              <a:ext uri="{FF2B5EF4-FFF2-40B4-BE49-F238E27FC236}">
-                <a16:creationId xmlns:a16="http://schemas.microsoft.com/office/drawing/2014/main" id="{7693EDF1-2DD0-2CE3-9ED9-948D3A4B77D5}"/>
-              </a:ext>
-            </a:extLst>
-          </p:cNvPr>
+            <a:endParaRPr lang="en-US" dirty="0"/>
+          </a:p>
+        </p:txBody>
+      </p:sp>
+      <p:sp>
+        <p:nvSpPr>
+          <p:cNvPr id="3" name="Content Placeholder 2"/>
           <p:cNvSpPr>
             <a:spLocks noGrp="1"/>
           </p:cNvSpPr>
@@ -2314,19 +2636,13 @@
               <a:rPr lang="en-US"/>
               <a:t>Fifth level</a:t>
             </a:r>
-            <a:endParaRPr lang="en-IN"/>
-          </a:p>
-        </p:txBody>
-      </p:sp>
-      <p:sp>
-        <p:nvSpPr>
-          <p:cNvPr id="4" name="Text Placeholder 3">
-            <a:extLst>
-              <a:ext uri="{FF2B5EF4-FFF2-40B4-BE49-F238E27FC236}">
-                <a16:creationId xmlns:a16="http://schemas.microsoft.com/office/drawing/2014/main" id="{310A90D5-C2C2-3FB2-A883-998011CEA730}"/>
-              </a:ext>
-            </a:extLst>
-          </p:cNvPr>
+            <a:endParaRPr lang="en-US" dirty="0"/>
+          </a:p>
+        </p:txBody>
+      </p:sp>
+      <p:sp>
+        <p:nvSpPr>
+          <p:cNvPr id="4" name="Text Placeholder 3"/>
           <p:cNvSpPr>
             <a:spLocks noGrp="1"/>
           </p:cNvSpPr>
@@ -2391,13 +2707,7 @@
       </p:sp>
       <p:sp>
         <p:nvSpPr>
-          <p:cNvPr id="5" name="Date Placeholder 4">
-            <a:extLst>
-              <a:ext uri="{FF2B5EF4-FFF2-40B4-BE49-F238E27FC236}">
-                <a16:creationId xmlns:a16="http://schemas.microsoft.com/office/drawing/2014/main" id="{7E83D20C-BD62-2731-B759-CDB98C9078A1}"/>
-              </a:ext>
-            </a:extLst>
-          </p:cNvPr>
+          <p:cNvPr id="5" name="Date Placeholder 4"/>
           <p:cNvSpPr>
             <a:spLocks noGrp="1"/>
           </p:cNvSpPr>
@@ -2412,7 +2722,7 @@
           <a:p>
             <a:fld id="{138BECAB-2E07-4D0D-9FD6-90C32D437B4E}" type="datetimeFigureOut">
               <a:rPr lang="en-IN" smtClean="0"/>
-              <a:t>25-07-2026</a:t>
+              <a:t>26-07-2026</a:t>
             </a:fld>
             <a:endParaRPr lang="en-IN"/>
           </a:p>
@@ -2420,13 +2730,7 @@
       </p:sp>
       <p:sp>
         <p:nvSpPr>
-          <p:cNvPr id="6" name="Footer Placeholder 5">
-            <a:extLst>
-              <a:ext uri="{FF2B5EF4-FFF2-40B4-BE49-F238E27FC236}">
-                <a16:creationId xmlns:a16="http://schemas.microsoft.com/office/drawing/2014/main" id="{9D20C774-CEAE-9DF7-812A-A7F242D94805}"/>
-              </a:ext>
-            </a:extLst>
-          </p:cNvPr>
+          <p:cNvPr id="6" name="Footer Placeholder 5"/>
           <p:cNvSpPr>
             <a:spLocks noGrp="1"/>
           </p:cNvSpPr>
@@ -2445,13 +2749,7 @@
       </p:sp>
       <p:sp>
         <p:nvSpPr>
-          <p:cNvPr id="7" name="Slide Number Placeholder 6">
-            <a:extLst>
-              <a:ext uri="{FF2B5EF4-FFF2-40B4-BE49-F238E27FC236}">
-                <a16:creationId xmlns:a16="http://schemas.microsoft.com/office/drawing/2014/main" id="{89314BED-0748-C7E3-7076-CBF4BFFDD839}"/>
-              </a:ext>
-            </a:extLst>
-          </p:cNvPr>
+          <p:cNvPr id="7" name="Slide Number Placeholder 6"/>
           <p:cNvSpPr>
             <a:spLocks noGrp="1"/>
           </p:cNvSpPr>
@@ -2475,7 +2773,7 @@
     </p:spTree>
     <p:extLst>
       <p:ext uri="{BB962C8B-B14F-4D97-AF65-F5344CB8AC3E}">
-        <p14:creationId xmlns:p14="http://schemas.microsoft.com/office/powerpoint/2010/main" val="2064004244"/>
+        <p14:creationId xmlns:p14="http://schemas.microsoft.com/office/powerpoint/2010/main" val="58754748"/>
       </p:ext>
     </p:extLst>
   </p:cSld>
@@ -2504,13 +2802,7 @@
       </p:grpSpPr>
       <p:sp>
         <p:nvSpPr>
-          <p:cNvPr id="2" name="Title 1">
-            <a:extLst>
-              <a:ext uri="{FF2B5EF4-FFF2-40B4-BE49-F238E27FC236}">
-                <a16:creationId xmlns:a16="http://schemas.microsoft.com/office/drawing/2014/main" id="{0988100E-D1E8-0248-4BEB-033047B6033D}"/>
-              </a:ext>
-            </a:extLst>
-          </p:cNvPr>
+          <p:cNvPr id="2" name="Title 1"/>
           <p:cNvSpPr>
             <a:spLocks noGrp="1"/>
           </p:cNvSpPr>
@@ -2536,21 +2828,15 @@
               <a:rPr lang="en-US"/>
               <a:t>Click to edit Master title style</a:t>
             </a:r>
-            <a:endParaRPr lang="en-IN"/>
-          </a:p>
-        </p:txBody>
-      </p:sp>
-      <p:sp>
-        <p:nvSpPr>
-          <p:cNvPr id="3" name="Picture Placeholder 2">
-            <a:extLst>
-              <a:ext uri="{FF2B5EF4-FFF2-40B4-BE49-F238E27FC236}">
-                <a16:creationId xmlns:a16="http://schemas.microsoft.com/office/drawing/2014/main" id="{5CDC14AD-79B7-2F78-D815-EF5F34C046F2}"/>
-              </a:ext>
-            </a:extLst>
-          </p:cNvPr>
-          <p:cNvSpPr>
-            <a:spLocks noGrp="1"/>
+            <a:endParaRPr lang="en-US" dirty="0"/>
+          </a:p>
+        </p:txBody>
+      </p:sp>
+      <p:sp>
+        <p:nvSpPr>
+          <p:cNvPr id="3" name="Picture Placeholder 2"/>
+          <p:cNvSpPr>
+            <a:spLocks noGrp="1" noChangeAspect="1"/>
           </p:cNvSpPr>
           <p:nvPr>
             <p:ph type="pic" idx="1"/>
@@ -2563,7 +2849,7 @@
           </a:xfrm>
         </p:spPr>
         <p:txBody>
-          <a:bodyPr/>
+          <a:bodyPr anchor="t"/>
           <a:lstStyle>
             <a:lvl1pPr marL="0" indent="0">
               <a:buNone/>
@@ -2603,19 +2889,17 @@
             </a:lvl9pPr>
           </a:lstStyle>
           <a:p>
-            <a:endParaRPr lang="en-IN"/>
-          </a:p>
-        </p:txBody>
-      </p:sp>
-      <p:sp>
-        <p:nvSpPr>
-          <p:cNvPr id="4" name="Text Placeholder 3">
-            <a:extLst>
-              <a:ext uri="{FF2B5EF4-FFF2-40B4-BE49-F238E27FC236}">
-                <a16:creationId xmlns:a16="http://schemas.microsoft.com/office/drawing/2014/main" id="{069F6A28-A400-8714-1BA9-097C1B0E6E64}"/>
-              </a:ext>
-            </a:extLst>
-          </p:cNvPr>
+            <a:r>
+              <a:rPr lang="en-US"/>
+              <a:t>Click icon to add picture</a:t>
+            </a:r>
+            <a:endParaRPr lang="en-US" dirty="0"/>
+          </a:p>
+        </p:txBody>
+      </p:sp>
+      <p:sp>
+        <p:nvSpPr>
+          <p:cNvPr id="4" name="Text Placeholder 3"/>
           <p:cNvSpPr>
             <a:spLocks noGrp="1"/>
           </p:cNvSpPr>
@@ -2680,13 +2964,7 @@
       </p:sp>
       <p:sp>
         <p:nvSpPr>
-          <p:cNvPr id="5" name="Date Placeholder 4">
-            <a:extLst>
-              <a:ext uri="{FF2B5EF4-FFF2-40B4-BE49-F238E27FC236}">
-                <a16:creationId xmlns:a16="http://schemas.microsoft.com/office/drawing/2014/main" id="{2A4FF7DE-272C-6A1D-002F-A25E4A8A85CF}"/>
-              </a:ext>
-            </a:extLst>
-          </p:cNvPr>
+          <p:cNvPr id="5" name="Date Placeholder 4"/>
           <p:cNvSpPr>
             <a:spLocks noGrp="1"/>
           </p:cNvSpPr>
@@ -2701,7 +2979,7 @@
           <a:p>
             <a:fld id="{138BECAB-2E07-4D0D-9FD6-90C32D437B4E}" type="datetimeFigureOut">
               <a:rPr lang="en-IN" smtClean="0"/>
-              <a:t>25-07-2026</a:t>
+              <a:t>26-07-2026</a:t>
             </a:fld>
             <a:endParaRPr lang="en-IN"/>
           </a:p>
@@ -2709,13 +2987,7 @@
       </p:sp>
       <p:sp>
         <p:nvSpPr>
-          <p:cNvPr id="6" name="Footer Placeholder 5">
-            <a:extLst>
-              <a:ext uri="{FF2B5EF4-FFF2-40B4-BE49-F238E27FC236}">
-                <a16:creationId xmlns:a16="http://schemas.microsoft.com/office/drawing/2014/main" id="{60269EAE-CEDC-C6F6-91A4-04F304A08463}"/>
-              </a:ext>
-            </a:extLst>
-          </p:cNvPr>
+          <p:cNvPr id="6" name="Footer Placeholder 5"/>
           <p:cNvSpPr>
             <a:spLocks noGrp="1"/>
           </p:cNvSpPr>
@@ -2734,13 +3006,7 @@
       </p:sp>
       <p:sp>
         <p:nvSpPr>
-          <p:cNvPr id="7" name="Slide Number Placeholder 6">
-            <a:extLst>
-              <a:ext uri="{FF2B5EF4-FFF2-40B4-BE49-F238E27FC236}">
-                <a16:creationId xmlns:a16="http://schemas.microsoft.com/office/drawing/2014/main" id="{0F21D486-A031-ECFC-FA26-60E5A8639437}"/>
-              </a:ext>
-            </a:extLst>
-          </p:cNvPr>
+          <p:cNvPr id="7" name="Slide Number Placeholder 6"/>
           <p:cNvSpPr>
             <a:spLocks noGrp="1"/>
           </p:cNvSpPr>
@@ -2764,7 +3030,7 @@
     </p:spTree>
     <p:extLst>
       <p:ext uri="{BB962C8B-B14F-4D97-AF65-F5344CB8AC3E}">
-        <p14:creationId xmlns:p14="http://schemas.microsoft.com/office/powerpoint/2010/main" val="2928978927"/>
+        <p14:creationId xmlns:p14="http://schemas.microsoft.com/office/powerpoint/2010/main" val="269205357"/>
       </p:ext>
     </p:extLst>
   </p:cSld>
@@ -2798,13 +3064,7 @@
       </p:grpSpPr>
       <p:sp>
         <p:nvSpPr>
-          <p:cNvPr id="2" name="Title Placeholder 1">
-            <a:extLst>
-              <a:ext uri="{FF2B5EF4-FFF2-40B4-BE49-F238E27FC236}">
-                <a16:creationId xmlns:a16="http://schemas.microsoft.com/office/drawing/2014/main" id="{5A9B251B-F457-EC64-D089-8DC4276BF6FE}"/>
-              </a:ext>
-            </a:extLst>
-          </p:cNvPr>
+          <p:cNvPr id="2" name="Title Placeholder 1"/>
           <p:cNvSpPr>
             <a:spLocks noGrp="1"/>
           </p:cNvSpPr>
@@ -2831,19 +3091,13 @@
               <a:rPr lang="en-US"/>
               <a:t>Click to edit Master title style</a:t>
             </a:r>
-            <a:endParaRPr lang="en-IN"/>
-          </a:p>
-        </p:txBody>
-      </p:sp>
-      <p:sp>
-        <p:nvSpPr>
-          <p:cNvPr id="3" name="Text Placeholder 2">
-            <a:extLst>
-              <a:ext uri="{FF2B5EF4-FFF2-40B4-BE49-F238E27FC236}">
-                <a16:creationId xmlns:a16="http://schemas.microsoft.com/office/drawing/2014/main" id="{DA672817-8862-55BB-2994-D974B655ACC9}"/>
-              </a:ext>
-            </a:extLst>
-          </p:cNvPr>
+            <a:endParaRPr lang="en-US" dirty="0"/>
+          </a:p>
+        </p:txBody>
+      </p:sp>
+      <p:sp>
+        <p:nvSpPr>
+          <p:cNvPr id="3" name="Text Placeholder 2"/>
           <p:cNvSpPr>
             <a:spLocks noGrp="1"/>
           </p:cNvSpPr>
@@ -2899,19 +3153,13 @@
               <a:rPr lang="en-US"/>
               <a:t>Fifth level</a:t>
             </a:r>
-            <a:endParaRPr lang="en-IN"/>
-          </a:p>
-        </p:txBody>
-      </p:sp>
-      <p:sp>
-        <p:nvSpPr>
-          <p:cNvPr id="4" name="Date Placeholder 3">
-            <a:extLst>
-              <a:ext uri="{FF2B5EF4-FFF2-40B4-BE49-F238E27FC236}">
-                <a16:creationId xmlns:a16="http://schemas.microsoft.com/office/drawing/2014/main" id="{517FADB6-7421-8C6B-A1BE-63937CFB4EF6}"/>
-              </a:ext>
-            </a:extLst>
-          </p:cNvPr>
+            <a:endParaRPr lang="en-US" dirty="0"/>
+          </a:p>
+        </p:txBody>
+      </p:sp>
+      <p:sp>
+        <p:nvSpPr>
+          <p:cNvPr id="4" name="Date Placeholder 3"/>
           <p:cNvSpPr>
             <a:spLocks noGrp="1"/>
           </p:cNvSpPr>
@@ -2935,7 +3183,7 @@
               <a:defRPr sz="1200">
                 <a:solidFill>
                   <a:schemeClr val="tx1">
-                    <a:tint val="82000"/>
+                    <a:shade val="82000"/>
                   </a:schemeClr>
                 </a:solidFill>
               </a:defRPr>
@@ -2944,7 +3192,7 @@
           <a:p>
             <a:fld id="{138BECAB-2E07-4D0D-9FD6-90C32D437B4E}" type="datetimeFigureOut">
               <a:rPr lang="en-IN" smtClean="0"/>
-              <a:t>25-07-2026</a:t>
+              <a:t>26-07-2026</a:t>
             </a:fld>
             <a:endParaRPr lang="en-IN"/>
           </a:p>
@@ -2952,13 +3200,7 @@
       </p:sp>
       <p:sp>
         <p:nvSpPr>
-          <p:cNvPr id="5" name="Footer Placeholder 4">
-            <a:extLst>
-              <a:ext uri="{FF2B5EF4-FFF2-40B4-BE49-F238E27FC236}">
-                <a16:creationId xmlns:a16="http://schemas.microsoft.com/office/drawing/2014/main" id="{5261605F-C0B6-FA45-7EB2-73E60CAE171A}"/>
-              </a:ext>
-            </a:extLst>
-          </p:cNvPr>
+          <p:cNvPr id="5" name="Footer Placeholder 4"/>
           <p:cNvSpPr>
             <a:spLocks noGrp="1"/>
           </p:cNvSpPr>
@@ -2982,7 +3224,7 @@
               <a:defRPr sz="1200">
                 <a:solidFill>
                   <a:schemeClr val="tx1">
-                    <a:tint val="82000"/>
+                    <a:shade val="82000"/>
                   </a:schemeClr>
                 </a:solidFill>
               </a:defRPr>
@@ -2995,13 +3237,7 @@
       </p:sp>
       <p:sp>
         <p:nvSpPr>
-          <p:cNvPr id="6" name="Slide Number Placeholder 5">
-            <a:extLst>
-              <a:ext uri="{FF2B5EF4-FFF2-40B4-BE49-F238E27FC236}">
-                <a16:creationId xmlns:a16="http://schemas.microsoft.com/office/drawing/2014/main" id="{7D889C98-8A5A-9F33-AFF3-5102AE746D13}"/>
-              </a:ext>
-            </a:extLst>
-          </p:cNvPr>
+          <p:cNvPr id="6" name="Slide Number Placeholder 5"/>
           <p:cNvSpPr>
             <a:spLocks noGrp="1"/>
           </p:cNvSpPr>
@@ -3025,7 +3261,7 @@
               <a:defRPr sz="1200">
                 <a:solidFill>
                   <a:schemeClr val="tx1">
-                    <a:tint val="82000"/>
+                    <a:shade val="82000"/>
                   </a:schemeClr>
                 </a:solidFill>
               </a:defRPr>
@@ -3043,23 +3279,23 @@
     </p:spTree>
     <p:extLst>
       <p:ext uri="{BB962C8B-B14F-4D97-AF65-F5344CB8AC3E}">
-        <p14:creationId xmlns:p14="http://schemas.microsoft.com/office/powerpoint/2010/main" val="1961561530"/>
+        <p14:creationId xmlns:p14="http://schemas.microsoft.com/office/powerpoint/2010/main" val="3430984346"/>
       </p:ext>
     </p:extLst>
   </p:cSld>
-  <p:clrMap bg1="lt1" tx1="dk1" bg2="lt2" tx2="dk2" accent1="accent1" accent2="accent2" accent3="accent3" accent4="accent4" accent5="accent5" accent6="accent6" hlink="hlink" folHlink="folHlink"/>
+  <p:clrMap bg1="dk1" tx1="lt1" bg2="dk2" tx2="lt2" accent1="accent1" accent2="accent2" accent3="accent3" accent4="accent4" accent5="accent5" accent6="accent6" hlink="hlink" folHlink="folHlink"/>
   <p:sldLayoutIdLst>
-    <p:sldLayoutId id="2147483649" r:id="rId1"/>
-    <p:sldLayoutId id="2147483650" r:id="rId2"/>
-    <p:sldLayoutId id="2147483651" r:id="rId3"/>
-    <p:sldLayoutId id="2147483652" r:id="rId4"/>
-    <p:sldLayoutId id="2147483653" r:id="rId5"/>
-    <p:sldLayoutId id="2147483654" r:id="rId6"/>
-    <p:sldLayoutId id="2147483655" r:id="rId7"/>
-    <p:sldLayoutId id="2147483656" r:id="rId8"/>
-    <p:sldLayoutId id="2147483657" r:id="rId9"/>
-    <p:sldLayoutId id="2147483658" r:id="rId10"/>
-    <p:sldLayoutId id="2147483659" r:id="rId11"/>
+    <p:sldLayoutId id="2147483721" r:id="rId1"/>
+    <p:sldLayoutId id="2147483722" r:id="rId2"/>
+    <p:sldLayoutId id="2147483723" r:id="rId3"/>
+    <p:sldLayoutId id="2147483724" r:id="rId4"/>
+    <p:sldLayoutId id="2147483725" r:id="rId5"/>
+    <p:sldLayoutId id="2147483726" r:id="rId6"/>
+    <p:sldLayoutId id="2147483727" r:id="rId7"/>
+    <p:sldLayoutId id="2147483728" r:id="rId8"/>
+    <p:sldLayoutId id="2147483729" r:id="rId9"/>
+    <p:sldLayoutId id="2147483730" r:id="rId10"/>
+    <p:sldLayoutId id="2147483731" r:id="rId11"/>
   </p:sldLayoutIdLst>
   <p:txStyles>
     <p:titleStyle>
@@ -3421,19 +3657,24 @@
           <a:prstGeom prst="rect">
             <a:avLst/>
           </a:prstGeom>
+          <a:ln>
+            <a:solidFill>
+              <a:srgbClr val="002060"/>
+            </a:solidFill>
+          </a:ln>
         </p:spPr>
         <p:style>
-          <a:lnRef idx="2">
+          <a:lnRef idx="1">
             <a:schemeClr val="dk1"/>
           </a:lnRef>
-          <a:fillRef idx="1">
-            <a:schemeClr val="lt1"/>
+          <a:fillRef idx="3">
+            <a:schemeClr val="dk1"/>
           </a:fillRef>
-          <a:effectRef idx="0">
+          <a:effectRef idx="2">
             <a:schemeClr val="dk1"/>
           </a:effectRef>
           <a:fontRef idx="minor">
-            <a:schemeClr val="dk1"/>
+            <a:schemeClr val="lt1"/>
           </a:fontRef>
         </p:style>
         <p:txBody>
@@ -3472,19 +3713,24 @@
           <a:prstGeom prst="rect">
             <a:avLst/>
           </a:prstGeom>
+          <a:ln>
+            <a:solidFill>
+              <a:srgbClr val="002060"/>
+            </a:solidFill>
+          </a:ln>
         </p:spPr>
         <p:style>
-          <a:lnRef idx="2">
+          <a:lnRef idx="1">
             <a:schemeClr val="dk1"/>
           </a:lnRef>
-          <a:fillRef idx="1">
-            <a:schemeClr val="lt1"/>
+          <a:fillRef idx="3">
+            <a:schemeClr val="dk1"/>
           </a:fillRef>
-          <a:effectRef idx="0">
+          <a:effectRef idx="2">
             <a:schemeClr val="dk1"/>
           </a:effectRef>
           <a:fontRef idx="minor">
-            <a:schemeClr val="dk1"/>
+            <a:schemeClr val="lt1"/>
           </a:fontRef>
         </p:style>
         <p:txBody>
@@ -3523,19 +3769,24 @@
           <a:prstGeom prst="rect">
             <a:avLst/>
           </a:prstGeom>
+          <a:ln>
+            <a:solidFill>
+              <a:srgbClr val="002060"/>
+            </a:solidFill>
+          </a:ln>
         </p:spPr>
         <p:style>
-          <a:lnRef idx="2">
+          <a:lnRef idx="1">
             <a:schemeClr val="dk1"/>
           </a:lnRef>
-          <a:fillRef idx="1">
-            <a:schemeClr val="lt1"/>
+          <a:fillRef idx="3">
+            <a:schemeClr val="dk1"/>
           </a:fillRef>
-          <a:effectRef idx="0">
+          <a:effectRef idx="2">
             <a:schemeClr val="dk1"/>
           </a:effectRef>
           <a:fontRef idx="minor">
-            <a:schemeClr val="dk1"/>
+            <a:schemeClr val="lt1"/>
           </a:fontRef>
         </p:style>
         <p:txBody>
@@ -3574,19 +3825,24 @@
           <a:prstGeom prst="rect">
             <a:avLst/>
           </a:prstGeom>
+          <a:ln>
+            <a:solidFill>
+              <a:srgbClr val="002060"/>
+            </a:solidFill>
+          </a:ln>
         </p:spPr>
         <p:style>
-          <a:lnRef idx="2">
+          <a:lnRef idx="1">
             <a:schemeClr val="dk1"/>
           </a:lnRef>
-          <a:fillRef idx="1">
-            <a:schemeClr val="lt1"/>
+          <a:fillRef idx="3">
+            <a:schemeClr val="dk1"/>
           </a:fillRef>
-          <a:effectRef idx="0">
+          <a:effectRef idx="2">
             <a:schemeClr val="dk1"/>
           </a:effectRef>
           <a:fontRef idx="minor">
-            <a:schemeClr val="dk1"/>
+            <a:schemeClr val="lt1"/>
           </a:fontRef>
         </p:style>
         <p:txBody>
@@ -3625,19 +3881,24 @@
           <a:prstGeom prst="rect">
             <a:avLst/>
           </a:prstGeom>
+          <a:ln>
+            <a:solidFill>
+              <a:srgbClr val="002060"/>
+            </a:solidFill>
+          </a:ln>
         </p:spPr>
         <p:style>
-          <a:lnRef idx="2">
+          <a:lnRef idx="1">
             <a:schemeClr val="dk1"/>
           </a:lnRef>
-          <a:fillRef idx="1">
-            <a:schemeClr val="lt1"/>
+          <a:fillRef idx="3">
+            <a:schemeClr val="dk1"/>
           </a:fillRef>
-          <a:effectRef idx="0">
+          <a:effectRef idx="2">
             <a:schemeClr val="dk1"/>
           </a:effectRef>
           <a:fontRef idx="minor">
-            <a:schemeClr val="dk1"/>
+            <a:schemeClr val="lt1"/>
           </a:fontRef>
         </p:style>
         <p:txBody>
@@ -3676,19 +3937,24 @@
           <a:prstGeom prst="rect">
             <a:avLst/>
           </a:prstGeom>
+          <a:ln>
+            <a:solidFill>
+              <a:srgbClr val="002060"/>
+            </a:solidFill>
+          </a:ln>
         </p:spPr>
         <p:style>
-          <a:lnRef idx="2">
+          <a:lnRef idx="1">
             <a:schemeClr val="dk1"/>
           </a:lnRef>
-          <a:fillRef idx="1">
-            <a:schemeClr val="lt1"/>
+          <a:fillRef idx="3">
+            <a:schemeClr val="dk1"/>
           </a:fillRef>
-          <a:effectRef idx="0">
+          <a:effectRef idx="2">
             <a:schemeClr val="dk1"/>
           </a:effectRef>
           <a:fontRef idx="minor">
-            <a:schemeClr val="dk1"/>
+            <a:schemeClr val="lt1"/>
           </a:fontRef>
         </p:style>
         <p:txBody>
@@ -3727,19 +3993,24 @@
           <a:prstGeom prst="rect">
             <a:avLst/>
           </a:prstGeom>
+          <a:ln>
+            <a:solidFill>
+              <a:srgbClr val="002060"/>
+            </a:solidFill>
+          </a:ln>
         </p:spPr>
         <p:style>
-          <a:lnRef idx="2">
+          <a:lnRef idx="1">
             <a:schemeClr val="dk1"/>
           </a:lnRef>
-          <a:fillRef idx="1">
-            <a:schemeClr val="lt1"/>
+          <a:fillRef idx="3">
+            <a:schemeClr val="dk1"/>
           </a:fillRef>
-          <a:effectRef idx="0">
+          <a:effectRef idx="2">
             <a:schemeClr val="dk1"/>
           </a:effectRef>
           <a:fontRef idx="minor">
-            <a:schemeClr val="dk1"/>
+            <a:schemeClr val="lt1"/>
           </a:fontRef>
         </p:style>
         <p:txBody>
@@ -3778,19 +4049,24 @@
           <a:prstGeom prst="rect">
             <a:avLst/>
           </a:prstGeom>
+          <a:ln>
+            <a:solidFill>
+              <a:srgbClr val="002060"/>
+            </a:solidFill>
+          </a:ln>
         </p:spPr>
         <p:style>
-          <a:lnRef idx="2">
+          <a:lnRef idx="1">
             <a:schemeClr val="dk1"/>
           </a:lnRef>
-          <a:fillRef idx="1">
-            <a:schemeClr val="lt1"/>
+          <a:fillRef idx="3">
+            <a:schemeClr val="dk1"/>
           </a:fillRef>
-          <a:effectRef idx="0">
+          <a:effectRef idx="2">
             <a:schemeClr val="dk1"/>
           </a:effectRef>
           <a:fontRef idx="minor">
-            <a:schemeClr val="dk1"/>
+            <a:schemeClr val="lt1"/>
           </a:fontRef>
         </p:style>
         <p:txBody>
@@ -3859,19 +4135,24 @@
           <a:prstGeom prst="rect">
             <a:avLst/>
           </a:prstGeom>
+          <a:ln>
+            <a:solidFill>
+              <a:srgbClr val="002060"/>
+            </a:solidFill>
+          </a:ln>
         </p:spPr>
         <p:style>
-          <a:lnRef idx="2">
+          <a:lnRef idx="1">
             <a:schemeClr val="dk1"/>
           </a:lnRef>
-          <a:fillRef idx="1">
-            <a:schemeClr val="lt1"/>
+          <a:fillRef idx="3">
+            <a:schemeClr val="dk1"/>
           </a:fillRef>
-          <a:effectRef idx="0">
+          <a:effectRef idx="2">
             <a:schemeClr val="dk1"/>
           </a:effectRef>
           <a:fontRef idx="minor">
-            <a:schemeClr val="dk1"/>
+            <a:schemeClr val="lt1"/>
           </a:fontRef>
         </p:style>
         <p:txBody>
@@ -3910,19 +4191,24 @@
           <a:prstGeom prst="rect">
             <a:avLst/>
           </a:prstGeom>
+          <a:ln>
+            <a:solidFill>
+              <a:srgbClr val="002060"/>
+            </a:solidFill>
+          </a:ln>
         </p:spPr>
         <p:style>
-          <a:lnRef idx="2">
+          <a:lnRef idx="1">
             <a:schemeClr val="dk1"/>
           </a:lnRef>
-          <a:fillRef idx="1">
-            <a:schemeClr val="lt1"/>
+          <a:fillRef idx="3">
+            <a:schemeClr val="dk1"/>
           </a:fillRef>
-          <a:effectRef idx="0">
+          <a:effectRef idx="2">
             <a:schemeClr val="dk1"/>
           </a:effectRef>
           <a:fontRef idx="minor">
-            <a:schemeClr val="dk1"/>
+            <a:schemeClr val="lt1"/>
           </a:fontRef>
         </p:style>
         <p:txBody>
@@ -3961,19 +4247,24 @@
           <a:prstGeom prst="rect">
             <a:avLst/>
           </a:prstGeom>
+          <a:ln>
+            <a:solidFill>
+              <a:srgbClr val="002060"/>
+            </a:solidFill>
+          </a:ln>
         </p:spPr>
         <p:style>
-          <a:lnRef idx="2">
+          <a:lnRef idx="1">
             <a:schemeClr val="dk1"/>
           </a:lnRef>
-          <a:fillRef idx="1">
-            <a:schemeClr val="lt1"/>
+          <a:fillRef idx="3">
+            <a:schemeClr val="dk1"/>
           </a:fillRef>
-          <a:effectRef idx="0">
+          <a:effectRef idx="2">
             <a:schemeClr val="dk1"/>
           </a:effectRef>
           <a:fontRef idx="minor">
-            <a:schemeClr val="dk1"/>
+            <a:schemeClr val="lt1"/>
           </a:fontRef>
         </p:style>
         <p:txBody>
@@ -4012,19 +4303,24 @@
           <a:prstGeom prst="rect">
             <a:avLst/>
           </a:prstGeom>
+          <a:ln>
+            <a:solidFill>
+              <a:srgbClr val="002060"/>
+            </a:solidFill>
+          </a:ln>
         </p:spPr>
         <p:style>
-          <a:lnRef idx="2">
+          <a:lnRef idx="1">
             <a:schemeClr val="dk1"/>
           </a:lnRef>
-          <a:fillRef idx="1">
-            <a:schemeClr val="lt1"/>
+          <a:fillRef idx="3">
+            <a:schemeClr val="dk1"/>
           </a:fillRef>
-          <a:effectRef idx="0">
+          <a:effectRef idx="2">
             <a:schemeClr val="dk1"/>
           </a:effectRef>
           <a:fontRef idx="minor">
-            <a:schemeClr val="dk1"/>
+            <a:schemeClr val="lt1"/>
           </a:fontRef>
         </p:style>
         <p:txBody>
@@ -4074,19 +4370,24 @@
           <a:prstGeom prst="rect">
             <a:avLst/>
           </a:prstGeom>
+          <a:ln>
+            <a:solidFill>
+              <a:srgbClr val="002060"/>
+            </a:solidFill>
+          </a:ln>
         </p:spPr>
         <p:style>
-          <a:lnRef idx="2">
+          <a:lnRef idx="1">
             <a:schemeClr val="dk1"/>
           </a:lnRef>
-          <a:fillRef idx="1">
-            <a:schemeClr val="lt1"/>
+          <a:fillRef idx="3">
+            <a:schemeClr val="dk1"/>
           </a:fillRef>
-          <a:effectRef idx="0">
+          <a:effectRef idx="2">
             <a:schemeClr val="dk1"/>
           </a:effectRef>
           <a:fontRef idx="minor">
-            <a:schemeClr val="dk1"/>
+            <a:schemeClr val="lt1"/>
           </a:fontRef>
         </p:style>
         <p:txBody>
@@ -4195,19 +4496,24 @@
           <a:prstGeom prst="rect">
             <a:avLst/>
           </a:prstGeom>
+          <a:ln>
+            <a:solidFill>
+              <a:srgbClr val="002060"/>
+            </a:solidFill>
+          </a:ln>
         </p:spPr>
         <p:style>
-          <a:lnRef idx="2">
+          <a:lnRef idx="1">
             <a:schemeClr val="dk1"/>
           </a:lnRef>
-          <a:fillRef idx="1">
-            <a:schemeClr val="lt1"/>
+          <a:fillRef idx="3">
+            <a:schemeClr val="dk1"/>
           </a:fillRef>
-          <a:effectRef idx="0">
+          <a:effectRef idx="2">
             <a:schemeClr val="dk1"/>
           </a:effectRef>
           <a:fontRef idx="minor">
-            <a:schemeClr val="dk1"/>
+            <a:schemeClr val="lt1"/>
           </a:fontRef>
         </p:style>
         <p:txBody>
@@ -4251,19 +4557,24 @@
           <a:prstGeom prst="rect">
             <a:avLst/>
           </a:prstGeom>
+          <a:ln>
+            <a:solidFill>
+              <a:srgbClr val="002060"/>
+            </a:solidFill>
+          </a:ln>
         </p:spPr>
         <p:style>
-          <a:lnRef idx="2">
+          <a:lnRef idx="1">
             <a:schemeClr val="dk1"/>
           </a:lnRef>
-          <a:fillRef idx="1">
-            <a:schemeClr val="lt1"/>
+          <a:fillRef idx="3">
+            <a:schemeClr val="dk1"/>
           </a:fillRef>
-          <a:effectRef idx="0">
+          <a:effectRef idx="2">
             <a:schemeClr val="dk1"/>
           </a:effectRef>
           <a:fontRef idx="minor">
-            <a:schemeClr val="dk1"/>
+            <a:schemeClr val="lt1"/>
           </a:fontRef>
         </p:style>
         <p:txBody>
@@ -4302,19 +4613,24 @@
           <a:prstGeom prst="rect">
             <a:avLst/>
           </a:prstGeom>
+          <a:ln>
+            <a:solidFill>
+              <a:srgbClr val="002060"/>
+            </a:solidFill>
+          </a:ln>
         </p:spPr>
         <p:style>
-          <a:lnRef idx="2">
+          <a:lnRef idx="1">
             <a:schemeClr val="dk1"/>
           </a:lnRef>
-          <a:fillRef idx="1">
-            <a:schemeClr val="lt1"/>
+          <a:fillRef idx="3">
+            <a:schemeClr val="dk1"/>
           </a:fillRef>
-          <a:effectRef idx="0">
+          <a:effectRef idx="2">
             <a:schemeClr val="dk1"/>
           </a:effectRef>
           <a:fontRef idx="minor">
-            <a:schemeClr val="dk1"/>
+            <a:schemeClr val="lt1"/>
           </a:fontRef>
         </p:style>
         <p:txBody>
@@ -4353,19 +4669,24 @@
           <a:prstGeom prst="rect">
             <a:avLst/>
           </a:prstGeom>
+          <a:ln>
+            <a:solidFill>
+              <a:srgbClr val="002060"/>
+            </a:solidFill>
+          </a:ln>
         </p:spPr>
         <p:style>
-          <a:lnRef idx="2">
+          <a:lnRef idx="1">
             <a:schemeClr val="dk1"/>
           </a:lnRef>
-          <a:fillRef idx="1">
-            <a:schemeClr val="lt1"/>
+          <a:fillRef idx="3">
+            <a:schemeClr val="dk1"/>
           </a:fillRef>
-          <a:effectRef idx="0">
+          <a:effectRef idx="2">
             <a:schemeClr val="dk1"/>
           </a:effectRef>
           <a:fontRef idx="minor">
-            <a:schemeClr val="dk1"/>
+            <a:schemeClr val="lt1"/>
           </a:fontRef>
         </p:style>
         <p:txBody>
@@ -4404,19 +4725,24 @@
           <a:prstGeom prst="rect">
             <a:avLst/>
           </a:prstGeom>
+          <a:ln>
+            <a:solidFill>
+              <a:srgbClr val="002060"/>
+            </a:solidFill>
+          </a:ln>
         </p:spPr>
         <p:style>
-          <a:lnRef idx="2">
+          <a:lnRef idx="1">
             <a:schemeClr val="dk1"/>
           </a:lnRef>
-          <a:fillRef idx="1">
-            <a:schemeClr val="lt1"/>
+          <a:fillRef idx="3">
+            <a:schemeClr val="dk1"/>
           </a:fillRef>
-          <a:effectRef idx="0">
+          <a:effectRef idx="2">
             <a:schemeClr val="dk1"/>
           </a:effectRef>
           <a:fontRef idx="minor">
-            <a:schemeClr val="dk1"/>
+            <a:schemeClr val="lt1"/>
           </a:fontRef>
         </p:style>
         <p:txBody>
@@ -4460,19 +4786,24 @@
           <a:prstGeom prst="rect">
             <a:avLst/>
           </a:prstGeom>
+          <a:ln>
+            <a:solidFill>
+              <a:srgbClr val="002060"/>
+            </a:solidFill>
+          </a:ln>
         </p:spPr>
         <p:style>
-          <a:lnRef idx="2">
+          <a:lnRef idx="1">
             <a:schemeClr val="dk1"/>
           </a:lnRef>
-          <a:fillRef idx="1">
-            <a:schemeClr val="lt1"/>
+          <a:fillRef idx="3">
+            <a:schemeClr val="dk1"/>
           </a:fillRef>
-          <a:effectRef idx="0">
+          <a:effectRef idx="2">
             <a:schemeClr val="dk1"/>
           </a:effectRef>
           <a:fontRef idx="minor">
-            <a:schemeClr val="dk1"/>
+            <a:schemeClr val="lt1"/>
           </a:fontRef>
         </p:style>
         <p:txBody>
@@ -4519,19 +4850,24 @@
           <a:prstGeom prst="rect">
             <a:avLst/>
           </a:prstGeom>
+          <a:ln>
+            <a:solidFill>
+              <a:srgbClr val="002060"/>
+            </a:solidFill>
+          </a:ln>
         </p:spPr>
         <p:style>
-          <a:lnRef idx="2">
+          <a:lnRef idx="1">
             <a:schemeClr val="dk1"/>
           </a:lnRef>
-          <a:fillRef idx="1">
-            <a:schemeClr val="lt1"/>
+          <a:fillRef idx="3">
+            <a:schemeClr val="dk1"/>
           </a:fillRef>
-          <a:effectRef idx="0">
+          <a:effectRef idx="2">
             <a:schemeClr val="dk1"/>
           </a:effectRef>
           <a:fontRef idx="minor">
-            <a:schemeClr val="dk1"/>
+            <a:schemeClr val="lt1"/>
           </a:fontRef>
         </p:style>
         <p:txBody>
@@ -4570,19 +4906,24 @@
           <a:prstGeom prst="rect">
             <a:avLst/>
           </a:prstGeom>
+          <a:ln>
+            <a:solidFill>
+              <a:srgbClr val="002060"/>
+            </a:solidFill>
+          </a:ln>
         </p:spPr>
         <p:style>
-          <a:lnRef idx="2">
+          <a:lnRef idx="1">
             <a:schemeClr val="dk1"/>
           </a:lnRef>
-          <a:fillRef idx="1">
-            <a:schemeClr val="lt1"/>
+          <a:fillRef idx="3">
+            <a:schemeClr val="dk1"/>
           </a:fillRef>
-          <a:effectRef idx="0">
+          <a:effectRef idx="2">
             <a:schemeClr val="dk1"/>
           </a:effectRef>
           <a:fontRef idx="minor">
-            <a:schemeClr val="dk1"/>
+            <a:schemeClr val="lt1"/>
           </a:fontRef>
         </p:style>
         <p:txBody>
@@ -4657,19 +4998,24 @@
           <a:prstGeom prst="rect">
             <a:avLst/>
           </a:prstGeom>
+          <a:ln>
+            <a:solidFill>
+              <a:srgbClr val="002060"/>
+            </a:solidFill>
+          </a:ln>
         </p:spPr>
         <p:style>
-          <a:lnRef idx="2">
+          <a:lnRef idx="1">
             <a:schemeClr val="dk1"/>
           </a:lnRef>
-          <a:fillRef idx="1">
-            <a:schemeClr val="lt1"/>
+          <a:fillRef idx="3">
+            <a:schemeClr val="dk1"/>
           </a:fillRef>
-          <a:effectRef idx="0">
+          <a:effectRef idx="2">
             <a:schemeClr val="dk1"/>
           </a:effectRef>
           <a:fontRef idx="minor">
-            <a:schemeClr val="dk1"/>
+            <a:schemeClr val="lt1"/>
           </a:fontRef>
         </p:style>
         <p:txBody>
@@ -4738,19 +5084,24 @@
           <a:prstGeom prst="rect">
             <a:avLst/>
           </a:prstGeom>
+          <a:ln>
+            <a:solidFill>
+              <a:srgbClr val="002060"/>
+            </a:solidFill>
+          </a:ln>
         </p:spPr>
         <p:style>
-          <a:lnRef idx="2">
+          <a:lnRef idx="1">
             <a:schemeClr val="dk1"/>
           </a:lnRef>
-          <a:fillRef idx="1">
-            <a:schemeClr val="lt1"/>
+          <a:fillRef idx="3">
+            <a:schemeClr val="dk1"/>
           </a:fillRef>
-          <a:effectRef idx="0">
+          <a:effectRef idx="2">
             <a:schemeClr val="dk1"/>
           </a:effectRef>
           <a:fontRef idx="minor">
-            <a:schemeClr val="dk1"/>
+            <a:schemeClr val="lt1"/>
           </a:fontRef>
         </p:style>
         <p:txBody>
@@ -4759,7 +5110,7 @@
           <a:p>
             <a:pPr algn="ctr"/>
             <a:r>
-              <a:rPr lang="en-IN" sz="1200">
+              <a:rPr lang="en-IN" sz="1200" dirty="0">
                 <a:latin typeface="Calibri" panose="020F0502020204030204" pitchFamily="34" charset="0"/>
                 <a:ea typeface="Calibri" panose="020F0502020204030204" pitchFamily="34" charset="0"/>
                 <a:cs typeface="Calibri" panose="020F0502020204030204" pitchFamily="34" charset="0"/>
@@ -4789,19 +5140,24 @@
           <a:prstGeom prst="rect">
             <a:avLst/>
           </a:prstGeom>
+          <a:ln>
+            <a:solidFill>
+              <a:srgbClr val="002060"/>
+            </a:solidFill>
+          </a:ln>
         </p:spPr>
         <p:style>
-          <a:lnRef idx="2">
+          <a:lnRef idx="1">
             <a:schemeClr val="dk1"/>
           </a:lnRef>
-          <a:fillRef idx="1">
-            <a:schemeClr val="lt1"/>
+          <a:fillRef idx="3">
+            <a:schemeClr val="dk1"/>
           </a:fillRef>
-          <a:effectRef idx="0">
+          <a:effectRef idx="2">
             <a:schemeClr val="dk1"/>
           </a:effectRef>
           <a:fontRef idx="minor">
-            <a:schemeClr val="dk1"/>
+            <a:schemeClr val="lt1"/>
           </a:fontRef>
         </p:style>
         <p:txBody>
@@ -4840,19 +5196,24 @@
           <a:prstGeom prst="rect">
             <a:avLst/>
           </a:prstGeom>
+          <a:ln>
+            <a:solidFill>
+              <a:srgbClr val="002060"/>
+            </a:solidFill>
+          </a:ln>
         </p:spPr>
         <p:style>
-          <a:lnRef idx="2">
+          <a:lnRef idx="1">
             <a:schemeClr val="dk1"/>
           </a:lnRef>
-          <a:fillRef idx="1">
-            <a:schemeClr val="lt1"/>
+          <a:fillRef idx="3">
+            <a:schemeClr val="dk1"/>
           </a:fillRef>
-          <a:effectRef idx="0">
+          <a:effectRef idx="2">
             <a:schemeClr val="dk1"/>
           </a:effectRef>
           <a:fontRef idx="minor">
-            <a:schemeClr val="dk1"/>
+            <a:schemeClr val="lt1"/>
           </a:fontRef>
         </p:style>
         <p:txBody>
@@ -4891,19 +5252,24 @@
           <a:prstGeom prst="rect">
             <a:avLst/>
           </a:prstGeom>
+          <a:ln>
+            <a:solidFill>
+              <a:srgbClr val="002060"/>
+            </a:solidFill>
+          </a:ln>
         </p:spPr>
         <p:style>
-          <a:lnRef idx="2">
+          <a:lnRef idx="1">
             <a:schemeClr val="dk1"/>
           </a:lnRef>
-          <a:fillRef idx="1">
-            <a:schemeClr val="lt1"/>
+          <a:fillRef idx="3">
+            <a:schemeClr val="dk1"/>
           </a:fillRef>
-          <a:effectRef idx="0">
+          <a:effectRef idx="2">
             <a:schemeClr val="dk1"/>
           </a:effectRef>
           <a:fontRef idx="minor">
-            <a:schemeClr val="dk1"/>
+            <a:schemeClr val="lt1"/>
           </a:fontRef>
         </p:style>
         <p:txBody>
@@ -4942,19 +5308,24 @@
           <a:prstGeom prst="rect">
             <a:avLst/>
           </a:prstGeom>
+          <a:ln>
+            <a:solidFill>
+              <a:srgbClr val="002060"/>
+            </a:solidFill>
+          </a:ln>
         </p:spPr>
         <p:style>
-          <a:lnRef idx="2">
+          <a:lnRef idx="1">
             <a:schemeClr val="dk1"/>
           </a:lnRef>
-          <a:fillRef idx="1">
-            <a:schemeClr val="lt1"/>
+          <a:fillRef idx="3">
+            <a:schemeClr val="dk1"/>
           </a:fillRef>
-          <a:effectRef idx="0">
+          <a:effectRef idx="2">
             <a:schemeClr val="dk1"/>
           </a:effectRef>
           <a:fontRef idx="minor">
-            <a:schemeClr val="dk1"/>
+            <a:schemeClr val="lt1"/>
           </a:fontRef>
         </p:style>
         <p:txBody>
@@ -4998,19 +5369,24 @@
           <a:prstGeom prst="rect">
             <a:avLst/>
           </a:prstGeom>
+          <a:ln>
+            <a:solidFill>
+              <a:srgbClr val="002060"/>
+            </a:solidFill>
+          </a:ln>
         </p:spPr>
         <p:style>
-          <a:lnRef idx="2">
+          <a:lnRef idx="1">
             <a:schemeClr val="dk1"/>
           </a:lnRef>
-          <a:fillRef idx="1">
-            <a:schemeClr val="lt1"/>
+          <a:fillRef idx="3">
+            <a:schemeClr val="dk1"/>
           </a:fillRef>
-          <a:effectRef idx="0">
+          <a:effectRef idx="2">
             <a:schemeClr val="dk1"/>
           </a:effectRef>
           <a:fontRef idx="minor">
-            <a:schemeClr val="dk1"/>
+            <a:schemeClr val="lt1"/>
           </a:fontRef>
         </p:style>
         <p:txBody>
@@ -5049,19 +5425,24 @@
           <a:prstGeom prst="rect">
             <a:avLst/>
           </a:prstGeom>
+          <a:ln>
+            <a:solidFill>
+              <a:srgbClr val="002060"/>
+            </a:solidFill>
+          </a:ln>
         </p:spPr>
         <p:style>
-          <a:lnRef idx="2">
+          <a:lnRef idx="1">
             <a:schemeClr val="dk1"/>
           </a:lnRef>
-          <a:fillRef idx="1">
-            <a:schemeClr val="lt1"/>
+          <a:fillRef idx="3">
+            <a:schemeClr val="dk1"/>
           </a:fillRef>
-          <a:effectRef idx="0">
+          <a:effectRef idx="2">
             <a:schemeClr val="dk1"/>
           </a:effectRef>
           <a:fontRef idx="minor">
-            <a:schemeClr val="dk1"/>
+            <a:schemeClr val="lt1"/>
           </a:fontRef>
         </p:style>
         <p:txBody>
@@ -5100,19 +5481,24 @@
           <a:prstGeom prst="rect">
             <a:avLst/>
           </a:prstGeom>
+          <a:ln>
+            <a:solidFill>
+              <a:srgbClr val="002060"/>
+            </a:solidFill>
+          </a:ln>
         </p:spPr>
         <p:style>
-          <a:lnRef idx="2">
+          <a:lnRef idx="1">
             <a:schemeClr val="dk1"/>
           </a:lnRef>
-          <a:fillRef idx="1">
-            <a:schemeClr val="lt1"/>
+          <a:fillRef idx="3">
+            <a:schemeClr val="dk1"/>
           </a:fillRef>
-          <a:effectRef idx="0">
+          <a:effectRef idx="2">
             <a:schemeClr val="dk1"/>
           </a:effectRef>
           <a:fontRef idx="minor">
-            <a:schemeClr val="dk1"/>
+            <a:schemeClr val="lt1"/>
           </a:fontRef>
         </p:style>
         <p:txBody>
@@ -5187,7 +5573,7 @@
 <file path=ppt/theme/theme1.xml><?xml version="1.0" encoding="utf-8"?>
 <a:theme xmlns:a="http://schemas.openxmlformats.org/drawingml/2006/main" name="Office Theme">
   <a:themeElements>
-    <a:clrScheme name="Office">
+    <a:clrScheme name="Office Theme">
       <a:dk1>
         <a:sysClr val="windowText" lastClr="000000"/>
       </a:dk1>
@@ -5201,13 +5587,13 @@
         <a:srgbClr val="E8E8E8"/>
       </a:lt2>
       <a:accent1>
-        <a:srgbClr val="156082"/>
+        <a:srgbClr val="196B24"/>
       </a:accent1>
       <a:accent2>
-        <a:srgbClr val="E97132"/>
+        <a:srgbClr val="4EA72E"/>
       </a:accent2>
       <a:accent3>
-        <a:srgbClr val="196B24"/>
+        <a:srgbClr val="156082"/>
       </a:accent3>
       <a:accent4>
         <a:srgbClr val="0F9ED5"/>
@@ -5216,16 +5602,16 @@
         <a:srgbClr val="A02B93"/>
       </a:accent5>
       <a:accent6>
-        <a:srgbClr val="4EA72E"/>
+        <a:srgbClr val="E97132"/>
       </a:accent6>
       <a:hlink>
-        <a:srgbClr val="467886"/>
+        <a:srgbClr val="538D9D"/>
       </a:hlink>
       <a:folHlink>
-        <a:srgbClr val="96607D"/>
+        <a:srgbClr val="A5738E"/>
       </a:folHlink>
     </a:clrScheme>
-    <a:fontScheme name="Office">
+    <a:fontScheme name="Office Theme">
       <a:majorFont>
         <a:latin typeface="Aptos Display" panose="02110004020202020204"/>
         <a:ea typeface=""/>
@@ -5331,7 +5717,7 @@
         <a:font script="Tfng" typeface="Ebrima"/>
       </a:minorFont>
     </a:fontScheme>
-    <a:fmtScheme name="Office">
+    <a:fmtScheme name="Office Theme">
       <a:fillStyleLst>
         <a:solidFill>
           <a:schemeClr val="phClr"/>
@@ -5493,7 +5879,7 @@
   <a:extraClrSchemeLst/>
   <a:extLst>
     <a:ext uri="{05A4C25C-085E-4340-85A3-A5531E510DB2}">
-      <thm15:themeFamily xmlns:thm15="http://schemas.microsoft.com/office/thememl/2012/main" name="Office Theme" id="{2E142A2C-CD16-42D6-873A-C26D2A0506FA}" vid="{1BDDFF52-6CD6-40A5-AB3C-68EB2F1E4D0A}"/>
+      <thm15:themeFamily xmlns:thm15="http://schemas.microsoft.com/office/thememl/2012/main" name="Office Theme" id="{2E142A2C-CD16-42D6-873A-C26D2A0506FA}" vid="{C0A3E416-13B0-4CFE-8B85-8989D8AEFB51}"/>
     </a:ext>
   </a:extLst>
 </a:theme>
